--- a/telco-credit/outputs/dcb_deck_fa_editable.pptx
+++ b/telco-credit/outputs/dcb_deck_fa_editable.pptx
@@ -7,6 +7,7 @@
   <p:sldIdLst>
     <p:sldId id="256" r:id="rId7"/>
     <p:sldId id="257" r:id="rId8"/>
+    <p:sldId id="258" r:id="rId9"/>
   </p:sldIdLst>
   <p:sldSz cx="12192000" cy="6858000" type="screen4x3"/>
   <p:notesSz cx="6858000" cy="9144000"/>
@@ -4646,6 +4647,2930 @@
 </file>
 
 <file path=ppt/slides/slide2.xml><?xml version="1.0" encoding="utf-8"?>
+<p:sld xmlns:a="http://schemas.openxmlformats.org/drawingml/2006/main" xmlns:p="http://schemas.openxmlformats.org/presentationml/2006/main" xmlns:r="http://schemas.openxmlformats.org/officeDocument/2006/relationships">
+  <p:cSld>
+    <p:spTree>
+      <p:nvGrpSpPr>
+        <p:cNvPr id="1" name=""/>
+        <p:cNvGrpSpPr/>
+        <p:nvPr/>
+      </p:nvGrpSpPr>
+      <p:grpSpPr/>
+      <p:sp>
+        <p:nvSpPr>
+          <p:cNvPr id="2" name="TextBox 1"/>
+          <p:cNvSpPr txBox="1"/>
+          <p:nvPr/>
+        </p:nvSpPr>
+        <p:spPr>
+          <a:xfrm>
+            <a:off x="3606800" y="228600"/>
+            <a:ext cx="8128000" cy="381000"/>
+          </a:xfrm>
+          <a:prstGeom prst="rect">
+            <a:avLst/>
+          </a:prstGeom>
+          <a:noFill/>
+        </p:spPr>
+        <p:txBody>
+          <a:bodyPr wrap="none" lIns="0" rIns="0" tIns="0" bIns="0" anchor="ctr">
+            <a:noAutofit/>
+          </a:bodyPr>
+          <a:lstStyle/>
+          <a:p>
+            <a:pPr rtl="1" algn="r"/>
+            <a:r>
+              <a:rPr sz="2000" b="1" lang="fa-IR">
+                <a:solidFill>
+                  <a:srgbClr val="0B0B0B"/>
+                </a:solidFill>
+                <a:latin typeface="Tahoma"/>
+                <a:cs typeface="Tahoma"/>
+                <a:ea typeface="Tahoma"/>
+              </a:rPr>
+              <a:t>مدل‌ها — چه چیزی آزموده شد و چه چیزی انتخاب شد</a:t>
+            </a:r>
+          </a:p>
+        </p:txBody>
+      </p:sp>
+      <p:sp>
+        <p:nvSpPr>
+          <p:cNvPr id="3" name="TextBox 2"/>
+          <p:cNvSpPr txBox="1"/>
+          <p:nvPr/>
+        </p:nvSpPr>
+        <p:spPr>
+          <a:xfrm>
+            <a:off x="457200" y="279400"/>
+            <a:ext cx="3810000" cy="254000"/>
+          </a:xfrm>
+          <a:prstGeom prst="rect">
+            <a:avLst/>
+          </a:prstGeom>
+          <a:noFill/>
+        </p:spPr>
+        <p:txBody>
+          <a:bodyPr wrap="none" lIns="0" rIns="0" tIns="0" bIns="0" anchor="ctr">
+            <a:noAutofit/>
+          </a:bodyPr>
+          <a:lstStyle/>
+          <a:p>
+            <a:pPr rtl="1" algn="l"/>
+            <a:r>
+              <a:rPr sz="900" b="0" lang="fa-IR">
+                <a:solidFill>
+                  <a:srgbClr val="86857F"/>
+                </a:solidFill>
+                <a:latin typeface="Tahoma"/>
+                <a:cs typeface="Tahoma"/>
+                <a:ea typeface="Tahoma"/>
+              </a:rPr>
+              <a:t>بازآموزی ۱۴۰۵/۰۷/۱۴</a:t>
+            </a:r>
+          </a:p>
+        </p:txBody>
+      </p:sp>
+      <p:cxnSp>
+        <p:nvCxnSpPr>
+          <p:cNvPr id="4" name="Connector 3"/>
+          <p:cNvCxnSpPr/>
+          <p:nvPr/>
+        </p:nvCxnSpPr>
+        <p:spPr>
+          <a:xfrm>
+            <a:off x="457200" y="685800"/>
+            <a:ext cx="11277600" cy="0"/>
+          </a:xfrm>
+          <a:prstGeom prst="line">
+            <a:avLst/>
+          </a:prstGeom>
+          <a:ln w="17780">
+            <a:solidFill>
+              <a:srgbClr val="0B0B0B"/>
+            </a:solidFill>
+          </a:ln>
+          <a:effectLst/>
+        </p:spPr>
+      </p:cxnSp>
+      <p:graphicFrame>
+        <p:nvGraphicFramePr>
+          <p:cNvPr id="5" name="Table 4"/>
+          <p:cNvGraphicFramePr>
+            <a:graphicFrameLocks noGrp="1"/>
+          </p:cNvGraphicFramePr>
+          <p:nvPr/>
+        </p:nvGraphicFramePr>
+        <p:xfrm>
+          <a:off x="457200" y="787400"/>
+          <a:ext cx="11277600" cy="1473200"/>
+        </p:xfrm>
+        <a:graphic>
+          <a:graphicData uri="http://schemas.openxmlformats.org/drawingml/2006/table">
+            <a:tbl>
+              <a:tblPr/>
+              <a:tblGrid>
+                <a:gridCol w="1701800"/>
+                <a:gridCol w="1651000"/>
+                <a:gridCol w="4749800"/>
+                <a:gridCol w="3175000"/>
+              </a:tblGrid>
+              <a:tr h="304800">
+                <a:tc>
+                  <a:txBody>
+                    <a:bodyPr wrap="square">
+                      <a:noAutofit/>
+                    </a:bodyPr>
+                    <a:lstStyle/>
+                    <a:p>
+                      <a:pPr rtl="1" algn="ctr"/>
+                      <a:r>
+                        <a:rPr sz="850" b="0" lang="fa-IR">
+                          <a:solidFill>
+                            <a:srgbClr val="86857F"/>
+                          </a:solidFill>
+                          <a:latin typeface="Tahoma"/>
+                          <a:cs typeface="Tahoma"/>
+                          <a:ea typeface="Tahoma"/>
+                        </a:rPr>
+                        <a:t>نتیجه</a:t>
+                      </a:r>
+                    </a:p>
+                  </a:txBody>
+                  <a:tcPr marT="25400" marR="76200" marB="25400" marL="76200" anchor="ctr">
+                    <a:lnL w="9525" cap="flat" cmpd="sng" algn="ctr">
+                      <a:noFill/>
+                    </a:lnL>
+                    <a:lnR w="9525" cap="flat" cmpd="sng" algn="ctr">
+                      <a:noFill/>
+                    </a:lnR>
+                    <a:lnT w="9525" cap="flat" cmpd="sng" algn="ctr">
+                      <a:noFill/>
+                    </a:lnT>
+                    <a:lnB w="9525" cap="flat" cmpd="sng" algn="ctr">
+                      <a:solidFill>
+                        <a:srgbClr val="86857F"/>
+                      </a:solidFill>
+                    </a:lnB>
+                    <a:noFill/>
+                  </a:tcPr>
+                </a:tc>
+                <a:tc>
+                  <a:txBody>
+                    <a:bodyPr wrap="square">
+                      <a:noAutofit/>
+                    </a:bodyPr>
+                    <a:lstStyle/>
+                    <a:p>
+                      <a:pPr rtl="1" algn="ctr"/>
+                      <a:r>
+                        <a:rPr sz="850" b="0" lang="fa-IR">
+                          <a:solidFill>
+                            <a:srgbClr val="86857F"/>
+                          </a:solidFill>
+                          <a:latin typeface="Tahoma"/>
+                          <a:cs typeface="Tahoma"/>
+                          <a:ea typeface="Tahoma"/>
+                        </a:rPr>
+                        <a:t>AUC روی دادهٔ اعتبارسنجی</a:t>
+                      </a:r>
+                    </a:p>
+                  </a:txBody>
+                  <a:tcPr marT="25400" marR="76200" marB="25400" marL="76200" anchor="ctr">
+                    <a:lnL w="9525" cap="flat" cmpd="sng" algn="ctr">
+                      <a:noFill/>
+                    </a:lnL>
+                    <a:lnR w="9525" cap="flat" cmpd="sng" algn="ctr">
+                      <a:noFill/>
+                    </a:lnR>
+                    <a:lnT w="9525" cap="flat" cmpd="sng" algn="ctr">
+                      <a:noFill/>
+                    </a:lnT>
+                    <a:lnB w="9525" cap="flat" cmpd="sng" algn="ctr">
+                      <a:solidFill>
+                        <a:srgbClr val="86857F"/>
+                      </a:solidFill>
+                    </a:lnB>
+                    <a:noFill/>
+                  </a:tcPr>
+                </a:tc>
+                <a:tc>
+                  <a:txBody>
+                    <a:bodyPr wrap="square">
+                      <a:noAutofit/>
+                    </a:bodyPr>
+                    <a:lstStyle/>
+                    <a:p>
+                      <a:pPr rtl="1" algn="ctr"/>
+                      <a:r>
+                        <a:rPr sz="850" b="0" lang="fa-IR">
+                          <a:solidFill>
+                            <a:srgbClr val="86857F"/>
+                          </a:solidFill>
+                          <a:latin typeface="Tahoma"/>
+                          <a:cs typeface="Tahoma"/>
+                          <a:ea typeface="Tahoma"/>
+                        </a:rPr>
+                        <a:t>چیست</a:t>
+                      </a:r>
+                    </a:p>
+                  </a:txBody>
+                  <a:tcPr marT="25400" marR="76200" marB="25400" marL="76200" anchor="ctr">
+                    <a:lnL w="9525" cap="flat" cmpd="sng" algn="ctr">
+                      <a:noFill/>
+                    </a:lnL>
+                    <a:lnR w="9525" cap="flat" cmpd="sng" algn="ctr">
+                      <a:noFill/>
+                    </a:lnR>
+                    <a:lnT w="9525" cap="flat" cmpd="sng" algn="ctr">
+                      <a:noFill/>
+                    </a:lnT>
+                    <a:lnB w="9525" cap="flat" cmpd="sng" algn="ctr">
+                      <a:solidFill>
+                        <a:srgbClr val="86857F"/>
+                      </a:solidFill>
+                    </a:lnB>
+                    <a:noFill/>
+                  </a:tcPr>
+                </a:tc>
+                <a:tc>
+                  <a:txBody>
+                    <a:bodyPr wrap="square">
+                      <a:noAutofit/>
+                    </a:bodyPr>
+                    <a:lstStyle/>
+                    <a:p>
+                      <a:pPr rtl="1" algn="r"/>
+                      <a:r>
+                        <a:rPr sz="850" b="0" lang="fa-IR">
+                          <a:solidFill>
+                            <a:srgbClr val="86857F"/>
+                          </a:solidFill>
+                          <a:latin typeface="Tahoma"/>
+                          <a:cs typeface="Tahoma"/>
+                          <a:ea typeface="Tahoma"/>
+                        </a:rPr>
+                        <a:t>مدل</a:t>
+                      </a:r>
+                    </a:p>
+                  </a:txBody>
+                  <a:tcPr marT="25400" marR="76200" marB="25400" marL="76200" anchor="ctr">
+                    <a:lnL w="9525" cap="flat" cmpd="sng" algn="ctr">
+                      <a:noFill/>
+                    </a:lnL>
+                    <a:lnR w="9525" cap="flat" cmpd="sng" algn="ctr">
+                      <a:noFill/>
+                    </a:lnR>
+                    <a:lnT w="9525" cap="flat" cmpd="sng" algn="ctr">
+                      <a:noFill/>
+                    </a:lnT>
+                    <a:lnB w="9525" cap="flat" cmpd="sng" algn="ctr">
+                      <a:solidFill>
+                        <a:srgbClr val="86857F"/>
+                      </a:solidFill>
+                    </a:lnB>
+                    <a:noFill/>
+                  </a:tcPr>
+                </a:tc>
+              </a:tr>
+              <a:tr h="584200">
+                <a:tc>
+                  <a:txBody>
+                    <a:bodyPr wrap="square">
+                      <a:noAutofit/>
+                    </a:bodyPr>
+                    <a:lstStyle/>
+                    <a:p>
+                      <a:pPr rtl="1" algn="ctr"/>
+                      <a:r>
+                        <a:rPr sz="850" b="0" lang="fa-IR">
+                          <a:solidFill>
+                            <a:srgbClr val="4E4D4A"/>
+                          </a:solidFill>
+                          <a:latin typeface="Tahoma"/>
+                          <a:cs typeface="Tahoma"/>
+                          <a:ea typeface="Tahoma"/>
+                        </a:rPr>
+                        <a:t>مبنا. قابل توضیح به ازای هر مشترک، ولی ضعیف‌تر</a:t>
+                      </a:r>
+                    </a:p>
+                  </a:txBody>
+                  <a:tcPr marT="38100" marR="50800" marB="38100" marL="50800" anchor="ctr">
+                    <a:lnL w="9525" cap="flat" cmpd="sng" algn="ctr">
+                      <a:noFill/>
+                    </a:lnL>
+                    <a:lnR w="9525" cap="flat" cmpd="sng" algn="ctr">
+                      <a:noFill/>
+                    </a:lnR>
+                    <a:lnT w="9525" cap="flat" cmpd="sng" algn="ctr">
+                      <a:noFill/>
+                    </a:lnT>
+                    <a:lnB w="9525" cap="flat" cmpd="sng" algn="ctr">
+                      <a:solidFill>
+                        <a:srgbClr val="D4D3CC"/>
+                      </a:solidFill>
+                    </a:lnB>
+                    <a:noFill/>
+                  </a:tcPr>
+                </a:tc>
+                <a:tc>
+                  <a:txBody>
+                    <a:bodyPr wrap="none">
+                      <a:noAutofit/>
+                    </a:bodyPr>
+                    <a:lstStyle/>
+                    <a:p>
+                      <a:pPr rtl="1" algn="ctr"/>
+                      <a:r>
+                        <a:rPr sz="1050" b="0" lang="fa-IR">
+                          <a:solidFill>
+                            <a:srgbClr val="0B0B0B"/>
+                          </a:solidFill>
+                          <a:latin typeface="Tahoma"/>
+                          <a:cs typeface="Tahoma"/>
+                          <a:ea typeface="Tahoma"/>
+                        </a:rPr>
+                        <a:t>۰٫۷۸۴۳</a:t>
+                      </a:r>
+                    </a:p>
+                  </a:txBody>
+                  <a:tcPr marT="38100" marR="50800" marB="38100" marL="50800" anchor="ctr">
+                    <a:lnL w="9525" cap="flat" cmpd="sng" algn="ctr">
+                      <a:noFill/>
+                    </a:lnL>
+                    <a:lnR w="9525" cap="flat" cmpd="sng" algn="ctr">
+                      <a:noFill/>
+                    </a:lnR>
+                    <a:lnT w="9525" cap="flat" cmpd="sng" algn="ctr">
+                      <a:noFill/>
+                    </a:lnT>
+                    <a:lnB w="9525" cap="flat" cmpd="sng" algn="ctr">
+                      <a:solidFill>
+                        <a:srgbClr val="D4D3CC"/>
+                      </a:solidFill>
+                    </a:lnB>
+                    <a:noFill/>
+                  </a:tcPr>
+                </a:tc>
+                <a:tc>
+                  <a:txBody>
+                    <a:bodyPr wrap="square">
+                      <a:noAutofit/>
+                    </a:bodyPr>
+                    <a:lstStyle/>
+                    <a:p>
+                      <a:pPr rtl="1" algn="r"/>
+                      <a:r>
+                        <a:rPr sz="850" b="0" lang="fa-IR">
+                          <a:solidFill>
+                            <a:srgbClr val="4E4D4A"/>
+                          </a:solidFill>
+                          <a:latin typeface="Tahoma"/>
+                          <a:cs typeface="Tahoma"/>
+                          <a:ea typeface="Tahoma"/>
+                        </a:rPr>
+                        <a:t>رگرسیون لجستیک روی ویژگی‌های WOE — هر ویژگی به ۱۰ بازه تقسیم و با وزن شواهد جایگزین می‌شود</a:t>
+                      </a:r>
+                    </a:p>
+                  </a:txBody>
+                  <a:tcPr marT="38100" marR="76200" marB="38100" marL="76200" anchor="ctr">
+                    <a:lnL w="9525" cap="flat" cmpd="sng" algn="ctr">
+                      <a:noFill/>
+                    </a:lnL>
+                    <a:lnR w="9525" cap="flat" cmpd="sng" algn="ctr">
+                      <a:noFill/>
+                    </a:lnR>
+                    <a:lnT w="9525" cap="flat" cmpd="sng" algn="ctr">
+                      <a:noFill/>
+                    </a:lnT>
+                    <a:lnB w="9525" cap="flat" cmpd="sng" algn="ctr">
+                      <a:solidFill>
+                        <a:srgbClr val="D4D3CC"/>
+                      </a:solidFill>
+                    </a:lnB>
+                    <a:noFill/>
+                  </a:tcPr>
+                </a:tc>
+                <a:tc>
+                  <a:txBody>
+                    <a:bodyPr wrap="square">
+                      <a:noAutofit/>
+                    </a:bodyPr>
+                    <a:lstStyle/>
+                    <a:p>
+                      <a:pPr rtl="1" algn="r"/>
+                      <a:r>
+                        <a:rPr sz="1050" b="1" lang="fa-IR">
+                          <a:solidFill>
+                            <a:srgbClr val="0B0B0B"/>
+                          </a:solidFill>
+                          <a:latin typeface="Tahoma"/>
+                          <a:cs typeface="Tahoma"/>
+                          <a:ea typeface="Tahoma"/>
+                        </a:rPr>
+                        <a:t>کارت امتیازی لجستیک</a:t>
+                      </a:r>
+                    </a:p>
+                  </a:txBody>
+                  <a:tcPr marT="38100" marR="76200" marB="38100" marL="76200" anchor="ctr">
+                    <a:lnL w="9525" cap="flat" cmpd="sng" algn="ctr">
+                      <a:noFill/>
+                    </a:lnL>
+                    <a:lnR w="9525" cap="flat" cmpd="sng" algn="ctr">
+                      <a:noFill/>
+                    </a:lnR>
+                    <a:lnT w="9525" cap="flat" cmpd="sng" algn="ctr">
+                      <a:noFill/>
+                    </a:lnT>
+                    <a:lnB w="9525" cap="flat" cmpd="sng" algn="ctr">
+                      <a:solidFill>
+                        <a:srgbClr val="D4D3CC"/>
+                      </a:solidFill>
+                    </a:lnB>
+                    <a:noFill/>
+                  </a:tcPr>
+                </a:tc>
+              </a:tr>
+              <a:tr h="584200">
+                <a:tc>
+                  <a:txBody>
+                    <a:bodyPr wrap="square">
+                      <a:noAutofit/>
+                    </a:bodyPr>
+                    <a:lstStyle/>
+                    <a:p>
+                      <a:pPr rtl="1" algn="ctr"/>
+                      <a:r>
+                        <a:rPr sz="850" b="1" lang="fa-IR">
+                          <a:solidFill>
+                            <a:srgbClr val="0B0B0B"/>
+                          </a:solidFill>
+                          <a:latin typeface="Tahoma"/>
+                          <a:cs typeface="Tahoma"/>
+                          <a:ea typeface="Tahoma"/>
+                        </a:rPr>
+                        <a:t>انتخاب شد — ۰٫۰۳۱۴ بهتر از مبنا</a:t>
+                      </a:r>
+                    </a:p>
+                  </a:txBody>
+                  <a:tcPr marT="38100" marR="50800" marB="38100" marL="50800" anchor="ctr">
+                    <a:lnL w="9525" cap="flat" cmpd="sng" algn="ctr">
+                      <a:noFill/>
+                    </a:lnL>
+                    <a:lnR w="9525" cap="flat" cmpd="sng" algn="ctr">
+                      <a:noFill/>
+                    </a:lnR>
+                    <a:lnT w="9525" cap="flat" cmpd="sng" algn="ctr">
+                      <a:noFill/>
+                    </a:lnT>
+                    <a:lnB w="9525" cap="flat" cmpd="sng" algn="ctr">
+                      <a:noFill/>
+                    </a:lnB>
+                    <a:solidFill>
+                      <a:srgbClr val="DBE6F2"/>
+                    </a:solidFill>
+                  </a:tcPr>
+                </a:tc>
+                <a:tc>
+                  <a:txBody>
+                    <a:bodyPr wrap="none">
+                      <a:noAutofit/>
+                    </a:bodyPr>
+                    <a:lstStyle/>
+                    <a:p>
+                      <a:pPr rtl="1" algn="ctr"/>
+                      <a:r>
+                        <a:rPr sz="1050" b="1" lang="fa-IR">
+                          <a:solidFill>
+                            <a:srgbClr val="0B0B0B"/>
+                          </a:solidFill>
+                          <a:latin typeface="Tahoma"/>
+                          <a:cs typeface="Tahoma"/>
+                          <a:ea typeface="Tahoma"/>
+                        </a:rPr>
+                        <a:t>۰٫۸۱۵۷</a:t>
+                      </a:r>
+                    </a:p>
+                  </a:txBody>
+                  <a:tcPr marT="38100" marR="50800" marB="38100" marL="50800" anchor="ctr">
+                    <a:lnL w="9525" cap="flat" cmpd="sng" algn="ctr">
+                      <a:noFill/>
+                    </a:lnL>
+                    <a:lnR w="9525" cap="flat" cmpd="sng" algn="ctr">
+                      <a:noFill/>
+                    </a:lnR>
+                    <a:lnT w="9525" cap="flat" cmpd="sng" algn="ctr">
+                      <a:noFill/>
+                    </a:lnT>
+                    <a:lnB w="9525" cap="flat" cmpd="sng" algn="ctr">
+                      <a:noFill/>
+                    </a:lnB>
+                    <a:solidFill>
+                      <a:srgbClr val="DBE6F2"/>
+                    </a:solidFill>
+                  </a:tcPr>
+                </a:tc>
+                <a:tc>
+                  <a:txBody>
+                    <a:bodyPr wrap="square">
+                      <a:noAutofit/>
+                    </a:bodyPr>
+                    <a:lstStyle/>
+                    <a:p>
+                      <a:pPr rtl="1" algn="r"/>
+                      <a:r>
+                        <a:rPr sz="850" b="0" lang="fa-IR">
+                          <a:solidFill>
+                            <a:srgbClr val="4E4D4A"/>
+                          </a:solidFill>
+                          <a:latin typeface="Tahoma"/>
+                          <a:cs typeface="Tahoma"/>
+                          <a:ea typeface="Tahoma"/>
+                        </a:rPr>
+                        <a:t>HistGradientBoosting — ۴۰۰ درخت کم‌عمق که هرکدام خطای قبلی را اصلاح می‌کند و برهم‌کنش ویژگی‌ها را خودش پیدا می‌کند</a:t>
+                      </a:r>
+                    </a:p>
+                  </a:txBody>
+                  <a:tcPr marT="38100" marR="76200" marB="38100" marL="76200" anchor="ctr">
+                    <a:lnL w="9525" cap="flat" cmpd="sng" algn="ctr">
+                      <a:noFill/>
+                    </a:lnL>
+                    <a:lnR w="9525" cap="flat" cmpd="sng" algn="ctr">
+                      <a:noFill/>
+                    </a:lnR>
+                    <a:lnT w="9525" cap="flat" cmpd="sng" algn="ctr">
+                      <a:noFill/>
+                    </a:lnT>
+                    <a:lnB w="9525" cap="flat" cmpd="sng" algn="ctr">
+                      <a:noFill/>
+                    </a:lnB>
+                    <a:solidFill>
+                      <a:srgbClr val="DBE6F2"/>
+                    </a:solidFill>
+                  </a:tcPr>
+                </a:tc>
+                <a:tc>
+                  <a:txBody>
+                    <a:bodyPr wrap="square">
+                      <a:noAutofit/>
+                    </a:bodyPr>
+                    <a:lstStyle/>
+                    <a:p>
+                      <a:pPr rtl="1" algn="r"/>
+                      <a:r>
+                        <a:rPr sz="1050" b="1" lang="fa-IR">
+                          <a:solidFill>
+                            <a:srgbClr val="2A78D6"/>
+                          </a:solidFill>
+                          <a:latin typeface="Tahoma"/>
+                          <a:cs typeface="Tahoma"/>
+                          <a:ea typeface="Tahoma"/>
+                        </a:rPr>
+                        <a:t>گرادیان بوستینگ درختی</a:t>
+                      </a:r>
+                    </a:p>
+                  </a:txBody>
+                  <a:tcPr marT="38100" marR="76200" marB="38100" marL="76200" anchor="ctr">
+                    <a:lnL w="9525" cap="flat" cmpd="sng" algn="ctr">
+                      <a:noFill/>
+                    </a:lnL>
+                    <a:lnR w="9525" cap="flat" cmpd="sng" algn="ctr">
+                      <a:noFill/>
+                    </a:lnR>
+                    <a:lnT w="9525" cap="flat" cmpd="sng" algn="ctr">
+                      <a:noFill/>
+                    </a:lnT>
+                    <a:lnB w="9525" cap="flat" cmpd="sng" algn="ctr">
+                      <a:noFill/>
+                    </a:lnB>
+                    <a:solidFill>
+                      <a:srgbClr val="DBE6F2"/>
+                    </a:solidFill>
+                  </a:tcPr>
+                </a:tc>
+              </a:tr>
+            </a:tbl>
+          </a:graphicData>
+        </a:graphic>
+      </p:graphicFrame>
+      <p:sp>
+        <p:nvSpPr>
+          <p:cNvPr id="6" name="Rounded Rectangle 5"/>
+          <p:cNvSpPr/>
+          <p:nvPr/>
+        </p:nvSpPr>
+        <p:spPr>
+          <a:xfrm>
+            <a:off x="8991600" y="2387600"/>
+            <a:ext cx="2743200" cy="508000"/>
+          </a:xfrm>
+          <a:prstGeom prst="roundRect">
+            <a:avLst>
+              <a:gd name="adj" fmla="val 7000"/>
+            </a:avLst>
+          </a:prstGeom>
+          <a:solidFill>
+            <a:srgbClr val="F6F6F3"/>
+          </a:solidFill>
+          <a:ln w="9525">
+            <a:solidFill>
+              <a:srgbClr val="E2E1DB"/>
+            </a:solidFill>
+          </a:ln>
+          <a:effectLst/>
+        </p:spPr>
+        <p:txBody>
+          <a:bodyPr rtlCol="0" anchor="ctr" wrap="none"/>
+          <a:lstStyle/>
+          <a:p>
+            <a:pPr algn="ctr"/>
+          </a:p>
+        </p:txBody>
+      </p:sp>
+      <p:sp>
+        <p:nvSpPr>
+          <p:cNvPr id="7" name="TextBox 6"/>
+          <p:cNvSpPr txBox="1"/>
+          <p:nvPr/>
+        </p:nvSpPr>
+        <p:spPr>
+          <a:xfrm>
+            <a:off x="9093200" y="2438400"/>
+            <a:ext cx="2540000" cy="241300"/>
+          </a:xfrm>
+          <a:prstGeom prst="rect">
+            <a:avLst/>
+          </a:prstGeom>
+          <a:noFill/>
+        </p:spPr>
+        <p:txBody>
+          <a:bodyPr wrap="none" lIns="0" rIns="0" tIns="0" bIns="0" anchor="ctr">
+            <a:noAutofit/>
+          </a:bodyPr>
+          <a:lstStyle/>
+          <a:p>
+            <a:pPr rtl="1" algn="r"/>
+            <a:r>
+              <a:rPr sz="1600" b="1" lang="fa-IR">
+                <a:solidFill>
+                  <a:srgbClr val="2A78D6"/>
+                </a:solidFill>
+                <a:latin typeface="Tahoma"/>
+                <a:cs typeface="Tahoma"/>
+                <a:ea typeface="Tahoma"/>
+              </a:rPr>
+              <a:t>۰٫۸۲۷۸</a:t>
+            </a:r>
+          </a:p>
+        </p:txBody>
+      </p:sp>
+      <p:sp>
+        <p:nvSpPr>
+          <p:cNvPr id="8" name="TextBox 7"/>
+          <p:cNvSpPr txBox="1"/>
+          <p:nvPr/>
+        </p:nvSpPr>
+        <p:spPr>
+          <a:xfrm>
+            <a:off x="9093200" y="2679700"/>
+            <a:ext cx="2540000" cy="165100"/>
+          </a:xfrm>
+          <a:prstGeom prst="rect">
+            <a:avLst/>
+          </a:prstGeom>
+          <a:noFill/>
+        </p:spPr>
+        <p:txBody>
+          <a:bodyPr wrap="none" lIns="0" rIns="0" tIns="0" bIns="0" anchor="ctr">
+            <a:noAutofit/>
+          </a:bodyPr>
+          <a:lstStyle/>
+          <a:p>
+            <a:pPr rtl="1" algn="r"/>
+            <a:r>
+              <a:rPr sz="850" b="0" lang="fa-IR">
+                <a:solidFill>
+                  <a:srgbClr val="4E4D4A"/>
+                </a:solidFill>
+                <a:latin typeface="Tahoma"/>
+                <a:cs typeface="Tahoma"/>
+                <a:ea typeface="Tahoma"/>
+              </a:rPr>
+              <a:t>AUC روی دادهٔ کنارگذاشته</a:t>
+            </a:r>
+          </a:p>
+        </p:txBody>
+      </p:sp>
+      <p:sp>
+        <p:nvSpPr>
+          <p:cNvPr id="9" name="Rounded Rectangle 8"/>
+          <p:cNvSpPr/>
+          <p:nvPr/>
+        </p:nvSpPr>
+        <p:spPr>
+          <a:xfrm>
+            <a:off x="6146800" y="2387600"/>
+            <a:ext cx="2743200" cy="508000"/>
+          </a:xfrm>
+          <a:prstGeom prst="roundRect">
+            <a:avLst>
+              <a:gd name="adj" fmla="val 7000"/>
+            </a:avLst>
+          </a:prstGeom>
+          <a:solidFill>
+            <a:srgbClr val="F6F6F3"/>
+          </a:solidFill>
+          <a:ln w="9525">
+            <a:solidFill>
+              <a:srgbClr val="E2E1DB"/>
+            </a:solidFill>
+          </a:ln>
+          <a:effectLst/>
+        </p:spPr>
+        <p:txBody>
+          <a:bodyPr rtlCol="0" anchor="ctr" wrap="none"/>
+          <a:lstStyle/>
+          <a:p>
+            <a:pPr algn="ctr"/>
+          </a:p>
+        </p:txBody>
+      </p:sp>
+      <p:sp>
+        <p:nvSpPr>
+          <p:cNvPr id="10" name="TextBox 9"/>
+          <p:cNvSpPr txBox="1"/>
+          <p:nvPr/>
+        </p:nvSpPr>
+        <p:spPr>
+          <a:xfrm>
+            <a:off x="6248400" y="2438400"/>
+            <a:ext cx="2540000" cy="241300"/>
+          </a:xfrm>
+          <a:prstGeom prst="rect">
+            <a:avLst/>
+          </a:prstGeom>
+          <a:noFill/>
+        </p:spPr>
+        <p:txBody>
+          <a:bodyPr wrap="none" lIns="0" rIns="0" tIns="0" bIns="0" anchor="ctr">
+            <a:noAutofit/>
+          </a:bodyPr>
+          <a:lstStyle/>
+          <a:p>
+            <a:pPr rtl="1" algn="r"/>
+            <a:r>
+              <a:rPr sz="1600" b="1" lang="fa-IR">
+                <a:solidFill>
+                  <a:srgbClr val="2A78D6"/>
+                </a:solidFill>
+                <a:latin typeface="Tahoma"/>
+                <a:cs typeface="Tahoma"/>
+                <a:ea typeface="Tahoma"/>
+              </a:rPr>
+              <a:t>۰٫۶۵۵۷</a:t>
+            </a:r>
+          </a:p>
+        </p:txBody>
+      </p:sp>
+      <p:sp>
+        <p:nvSpPr>
+          <p:cNvPr id="11" name="TextBox 10"/>
+          <p:cNvSpPr txBox="1"/>
+          <p:nvPr/>
+        </p:nvSpPr>
+        <p:spPr>
+          <a:xfrm>
+            <a:off x="6248400" y="2679700"/>
+            <a:ext cx="2540000" cy="165100"/>
+          </a:xfrm>
+          <a:prstGeom prst="rect">
+            <a:avLst/>
+          </a:prstGeom>
+          <a:noFill/>
+        </p:spPr>
+        <p:txBody>
+          <a:bodyPr wrap="none" lIns="0" rIns="0" tIns="0" bIns="0" anchor="ctr">
+            <a:noAutofit/>
+          </a:bodyPr>
+          <a:lstStyle/>
+          <a:p>
+            <a:pPr rtl="1" algn="r"/>
+            <a:r>
+              <a:rPr sz="850" b="0" lang="fa-IR">
+                <a:solidFill>
+                  <a:srgbClr val="4E4D4A"/>
+                </a:solidFill>
+                <a:latin typeface="Tahoma"/>
+                <a:cs typeface="Tahoma"/>
+                <a:ea typeface="Tahoma"/>
+              </a:rPr>
+              <a:t>ضریب جینی</a:t>
+            </a:r>
+          </a:p>
+        </p:txBody>
+      </p:sp>
+      <p:sp>
+        <p:nvSpPr>
+          <p:cNvPr id="12" name="Rounded Rectangle 11"/>
+          <p:cNvSpPr/>
+          <p:nvPr/>
+        </p:nvSpPr>
+        <p:spPr>
+          <a:xfrm>
+            <a:off x="3302000" y="2387600"/>
+            <a:ext cx="2743200" cy="508000"/>
+          </a:xfrm>
+          <a:prstGeom prst="roundRect">
+            <a:avLst>
+              <a:gd name="adj" fmla="val 7000"/>
+            </a:avLst>
+          </a:prstGeom>
+          <a:solidFill>
+            <a:srgbClr val="F6F6F3"/>
+          </a:solidFill>
+          <a:ln w="9525">
+            <a:solidFill>
+              <a:srgbClr val="E2E1DB"/>
+            </a:solidFill>
+          </a:ln>
+          <a:effectLst/>
+        </p:spPr>
+        <p:txBody>
+          <a:bodyPr rtlCol="0" anchor="ctr" wrap="none"/>
+          <a:lstStyle/>
+          <a:p>
+            <a:pPr algn="ctr"/>
+          </a:p>
+        </p:txBody>
+      </p:sp>
+      <p:sp>
+        <p:nvSpPr>
+          <p:cNvPr id="13" name="TextBox 12"/>
+          <p:cNvSpPr txBox="1"/>
+          <p:nvPr/>
+        </p:nvSpPr>
+        <p:spPr>
+          <a:xfrm>
+            <a:off x="3403600" y="2438400"/>
+            <a:ext cx="2540000" cy="241300"/>
+          </a:xfrm>
+          <a:prstGeom prst="rect">
+            <a:avLst/>
+          </a:prstGeom>
+          <a:noFill/>
+        </p:spPr>
+        <p:txBody>
+          <a:bodyPr wrap="none" lIns="0" rIns="0" tIns="0" bIns="0" anchor="ctr">
+            <a:noAutofit/>
+          </a:bodyPr>
+          <a:lstStyle/>
+          <a:p>
+            <a:pPr rtl="1" algn="r"/>
+            <a:r>
+              <a:rPr sz="1600" b="1" lang="fa-IR">
+                <a:solidFill>
+                  <a:srgbClr val="2A78D6"/>
+                </a:solidFill>
+                <a:latin typeface="Tahoma"/>
+                <a:cs typeface="Tahoma"/>
+                <a:ea typeface="Tahoma"/>
+              </a:rPr>
+              <a:t>۰٫۵۱۵۱</a:t>
+            </a:r>
+          </a:p>
+        </p:txBody>
+      </p:sp>
+      <p:sp>
+        <p:nvSpPr>
+          <p:cNvPr id="14" name="TextBox 13"/>
+          <p:cNvSpPr txBox="1"/>
+          <p:nvPr/>
+        </p:nvSpPr>
+        <p:spPr>
+          <a:xfrm>
+            <a:off x="3403600" y="2679700"/>
+            <a:ext cx="2540000" cy="165100"/>
+          </a:xfrm>
+          <a:prstGeom prst="rect">
+            <a:avLst/>
+          </a:prstGeom>
+          <a:noFill/>
+        </p:spPr>
+        <p:txBody>
+          <a:bodyPr wrap="none" lIns="0" rIns="0" tIns="0" bIns="0" anchor="ctr">
+            <a:noAutofit/>
+          </a:bodyPr>
+          <a:lstStyle/>
+          <a:p>
+            <a:pPr rtl="1" algn="r"/>
+            <a:r>
+              <a:rPr sz="850" b="0" lang="fa-IR">
+                <a:solidFill>
+                  <a:srgbClr val="4E4D4A"/>
+                </a:solidFill>
+                <a:latin typeface="Tahoma"/>
+                <a:cs typeface="Tahoma"/>
+                <a:ea typeface="Tahoma"/>
+              </a:rPr>
+              <a:t>آمارهٔ KS</a:t>
+            </a:r>
+          </a:p>
+        </p:txBody>
+      </p:sp>
+      <p:sp>
+        <p:nvSpPr>
+          <p:cNvPr id="15" name="Rounded Rectangle 14"/>
+          <p:cNvSpPr/>
+          <p:nvPr/>
+        </p:nvSpPr>
+        <p:spPr>
+          <a:xfrm>
+            <a:off x="457200" y="2387600"/>
+            <a:ext cx="2743200" cy="508000"/>
+          </a:xfrm>
+          <a:prstGeom prst="roundRect">
+            <a:avLst>
+              <a:gd name="adj" fmla="val 7000"/>
+            </a:avLst>
+          </a:prstGeom>
+          <a:solidFill>
+            <a:srgbClr val="F6F6F3"/>
+          </a:solidFill>
+          <a:ln w="9525">
+            <a:solidFill>
+              <a:srgbClr val="E2E1DB"/>
+            </a:solidFill>
+          </a:ln>
+          <a:effectLst/>
+        </p:spPr>
+        <p:txBody>
+          <a:bodyPr rtlCol="0" anchor="ctr" wrap="none"/>
+          <a:lstStyle/>
+          <a:p>
+            <a:pPr algn="ctr"/>
+          </a:p>
+        </p:txBody>
+      </p:sp>
+      <p:sp>
+        <p:nvSpPr>
+          <p:cNvPr id="16" name="TextBox 15"/>
+          <p:cNvSpPr txBox="1"/>
+          <p:nvPr/>
+        </p:nvSpPr>
+        <p:spPr>
+          <a:xfrm>
+            <a:off x="558800" y="2438400"/>
+            <a:ext cx="2540000" cy="241300"/>
+          </a:xfrm>
+          <a:prstGeom prst="rect">
+            <a:avLst/>
+          </a:prstGeom>
+          <a:noFill/>
+        </p:spPr>
+        <p:txBody>
+          <a:bodyPr wrap="none" lIns="0" rIns="0" tIns="0" bIns="0" anchor="ctr">
+            <a:noAutofit/>
+          </a:bodyPr>
+          <a:lstStyle/>
+          <a:p>
+            <a:pPr rtl="1" algn="r"/>
+            <a:r>
+              <a:rPr sz="1600" b="1" lang="fa-IR">
+                <a:solidFill>
+                  <a:srgbClr val="2A78D6"/>
+                </a:solidFill>
+                <a:latin typeface="Tahoma"/>
+                <a:cs typeface="Tahoma"/>
+                <a:ea typeface="Tahoma"/>
+              </a:rPr>
+              <a:t>۱٫۷ درصد</a:t>
+            </a:r>
+          </a:p>
+        </p:txBody>
+      </p:sp>
+      <p:sp>
+        <p:nvSpPr>
+          <p:cNvPr id="17" name="TextBox 16"/>
+          <p:cNvSpPr txBox="1"/>
+          <p:nvPr/>
+        </p:nvSpPr>
+        <p:spPr>
+          <a:xfrm>
+            <a:off x="558800" y="2679700"/>
+            <a:ext cx="2540000" cy="165100"/>
+          </a:xfrm>
+          <a:prstGeom prst="rect">
+            <a:avLst/>
+          </a:prstGeom>
+          <a:noFill/>
+        </p:spPr>
+        <p:txBody>
+          <a:bodyPr wrap="none" lIns="0" rIns="0" tIns="0" bIns="0" anchor="ctr">
+            <a:noAutofit/>
+          </a:bodyPr>
+          <a:lstStyle/>
+          <a:p>
+            <a:pPr rtl="1" algn="r"/>
+            <a:r>
+              <a:rPr sz="850" b="0" lang="fa-IR">
+                <a:solidFill>
+                  <a:srgbClr val="4E4D4A"/>
+                </a:solidFill>
+                <a:latin typeface="Tahoma"/>
+                <a:cs typeface="Tahoma"/>
+                <a:ea typeface="Tahoma"/>
+              </a:rPr>
+              <a:t>خطای سطح کالیبراسیون</a:t>
+            </a:r>
+          </a:p>
+        </p:txBody>
+      </p:sp>
+      <p:sp>
+        <p:nvSpPr>
+          <p:cNvPr id="18" name="TextBox 17"/>
+          <p:cNvSpPr txBox="1"/>
+          <p:nvPr/>
+        </p:nvSpPr>
+        <p:spPr>
+          <a:xfrm>
+            <a:off x="457200" y="3022600"/>
+            <a:ext cx="11277600" cy="508000"/>
+          </a:xfrm>
+          <a:prstGeom prst="rect">
+            <a:avLst/>
+          </a:prstGeom>
+          <a:noFill/>
+        </p:spPr>
+        <p:txBody>
+          <a:bodyPr wrap="square" lIns="0" rIns="0" tIns="0" bIns="0" anchor="t">
+            <a:noAutofit/>
+          </a:bodyPr>
+          <a:lstStyle/>
+          <a:p>
+            <a:pPr rtl="1" algn="r">
+              <a:lnSpc>
+                <a:spcPct val="140000"/>
+              </a:lnSpc>
+            </a:pPr>
+            <a:r>
+              <a:rPr sz="850" b="0" lang="fa-IR">
+                <a:solidFill>
+                  <a:srgbClr val="4E4D4A"/>
+                </a:solidFill>
+                <a:latin typeface="Tahoma"/>
+                <a:cs typeface="Tahoma"/>
+                <a:ea typeface="Tahoma"/>
+              </a:rPr>
+              <a:t>بیشترین چیزی که مدل از آن یاد می‌گیرد: سابقهٔ قطع سرویس سال قبل. شش ستونی که قطعی‌های سال گذشته را می‌شمارند، به‌تنهایی ۰٫۰۲۳۹ از AUC دادهٔ کنارگذاشته را می‌سازند — ۹۲ درصد از کل بهبود ۰٫۰۲۶۱ که بازآموزی داد. همین ستون‌ها پایدارترین ویژگی‌های مجموعه‌اند: PSI همهٔ آن‌ها زیر ۰٫۰۰۰۳ است. مدل خطی دو برابر مدل درختی از آن‌ها سود برد — ۰٫۰۴۵۸ در برابر ۰٫۰۲۳۹ — یعنی این سیگنال تقریباً جمع‌پذیر است و برای پیدا کردنش لازم نبود به درخت برسیم.</a:t>
+            </a:r>
+          </a:p>
+        </p:txBody>
+      </p:sp>
+      <p:sp>
+        <p:nvSpPr>
+          <p:cNvPr id="19" name="Rounded Rectangle 18"/>
+          <p:cNvSpPr/>
+          <p:nvPr/>
+        </p:nvSpPr>
+        <p:spPr>
+          <a:xfrm>
+            <a:off x="6654800" y="3606800"/>
+            <a:ext cx="5080000" cy="1320800"/>
+          </a:xfrm>
+          <a:prstGeom prst="roundRect">
+            <a:avLst>
+              <a:gd name="adj" fmla="val 7000"/>
+            </a:avLst>
+          </a:prstGeom>
+          <a:solidFill>
+            <a:srgbClr val="F6F6F3"/>
+          </a:solidFill>
+          <a:ln w="9525">
+            <a:solidFill>
+              <a:srgbClr val="E8E8E4"/>
+            </a:solidFill>
+          </a:ln>
+          <a:effectLst/>
+        </p:spPr>
+        <p:txBody>
+          <a:bodyPr rtlCol="0" anchor="ctr" wrap="none"/>
+          <a:lstStyle/>
+          <a:p>
+            <a:pPr algn="ctr"/>
+          </a:p>
+        </p:txBody>
+      </p:sp>
+      <p:sp>
+        <p:nvSpPr>
+          <p:cNvPr id="20" name="TextBox 19"/>
+          <p:cNvSpPr txBox="1"/>
+          <p:nvPr/>
+        </p:nvSpPr>
+        <p:spPr>
+          <a:xfrm>
+            <a:off x="6807200" y="3708400"/>
+            <a:ext cx="4775200" cy="152400"/>
+          </a:xfrm>
+          <a:prstGeom prst="rect">
+            <a:avLst/>
+          </a:prstGeom>
+          <a:noFill/>
+        </p:spPr>
+        <p:txBody>
+          <a:bodyPr wrap="none" lIns="0" rIns="0" tIns="0" bIns="0" anchor="ctr">
+            <a:noAutofit/>
+          </a:bodyPr>
+          <a:lstStyle/>
+          <a:p>
+            <a:pPr rtl="1" algn="r"/>
+            <a:r>
+              <a:rPr sz="950" b="1" lang="fa-IR">
+                <a:solidFill>
+                  <a:srgbClr val="4E4D4A"/>
+                </a:solidFill>
+                <a:latin typeface="Tahoma"/>
+                <a:cs typeface="Tahoma"/>
+                <a:ea typeface="Tahoma"/>
+              </a:rPr>
+              <a:t>داده و تفکیک</a:t>
+            </a:r>
+          </a:p>
+        </p:txBody>
+      </p:sp>
+      <p:sp>
+        <p:nvSpPr>
+          <p:cNvPr id="21" name="TextBox 20"/>
+          <p:cNvSpPr txBox="1"/>
+          <p:nvPr/>
+        </p:nvSpPr>
+        <p:spPr>
+          <a:xfrm>
+            <a:off x="8966200" y="3962400"/>
+            <a:ext cx="2616200" cy="139700"/>
+          </a:xfrm>
+          <a:prstGeom prst="rect">
+            <a:avLst/>
+          </a:prstGeom>
+          <a:noFill/>
+        </p:spPr>
+        <p:txBody>
+          <a:bodyPr wrap="none" lIns="0" rIns="0" tIns="0" bIns="0" anchor="ctr">
+            <a:noAutofit/>
+          </a:bodyPr>
+          <a:lstStyle/>
+          <a:p>
+            <a:pPr rtl="1" algn="r"/>
+            <a:r>
+              <a:rPr sz="800" b="0" lang="fa-IR">
+                <a:solidFill>
+                  <a:srgbClr val="4E4D4A"/>
+                </a:solidFill>
+                <a:latin typeface="Tahoma"/>
+                <a:cs typeface="Tahoma"/>
+                <a:ea typeface="Tahoma"/>
+              </a:rPr>
+              <a:t>سطر آموزش</a:t>
+            </a:r>
+          </a:p>
+        </p:txBody>
+      </p:sp>
+      <p:sp>
+        <p:nvSpPr>
+          <p:cNvPr id="22" name="TextBox 21"/>
+          <p:cNvSpPr txBox="1"/>
+          <p:nvPr/>
+        </p:nvSpPr>
+        <p:spPr>
+          <a:xfrm>
+            <a:off x="6807200" y="3962400"/>
+            <a:ext cx="2159000" cy="139700"/>
+          </a:xfrm>
+          <a:prstGeom prst="rect">
+            <a:avLst/>
+          </a:prstGeom>
+          <a:noFill/>
+        </p:spPr>
+        <p:txBody>
+          <a:bodyPr wrap="none" lIns="0" rIns="0" tIns="0" bIns="0" anchor="ctr">
+            <a:noAutofit/>
+          </a:bodyPr>
+          <a:lstStyle/>
+          <a:p>
+            <a:pPr rtl="1" algn="l"/>
+            <a:r>
+              <a:rPr sz="800" b="1" lang="fa-IR">
+                <a:solidFill>
+                  <a:srgbClr val="0B0B0B"/>
+                </a:solidFill>
+                <a:latin typeface="Tahoma"/>
+                <a:cs typeface="Tahoma"/>
+                <a:ea typeface="Tahoma"/>
+              </a:rPr>
+              <a:t>۸٬۷۰۱٬۰۸۵</a:t>
+            </a:r>
+          </a:p>
+        </p:txBody>
+      </p:sp>
+      <p:sp>
+        <p:nvSpPr>
+          <p:cNvPr id="23" name="TextBox 22"/>
+          <p:cNvSpPr txBox="1"/>
+          <p:nvPr/>
+        </p:nvSpPr>
+        <p:spPr>
+          <a:xfrm>
+            <a:off x="8966200" y="4152900"/>
+            <a:ext cx="2616200" cy="139700"/>
+          </a:xfrm>
+          <a:prstGeom prst="rect">
+            <a:avLst/>
+          </a:prstGeom>
+          <a:noFill/>
+        </p:spPr>
+        <p:txBody>
+          <a:bodyPr wrap="none" lIns="0" rIns="0" tIns="0" bIns="0" anchor="ctr">
+            <a:noAutofit/>
+          </a:bodyPr>
+          <a:lstStyle/>
+          <a:p>
+            <a:pPr rtl="1" algn="r"/>
+            <a:r>
+              <a:rPr sz="800" b="0" lang="fa-IR">
+                <a:solidFill>
+                  <a:srgbClr val="4E4D4A"/>
+                </a:solidFill>
+                <a:latin typeface="Tahoma"/>
+                <a:cs typeface="Tahoma"/>
+                <a:ea typeface="Tahoma"/>
+              </a:rPr>
+              <a:t>مورد بد در آن</a:t>
+            </a:r>
+          </a:p>
+        </p:txBody>
+      </p:sp>
+      <p:sp>
+        <p:nvSpPr>
+          <p:cNvPr id="24" name="TextBox 23"/>
+          <p:cNvSpPr txBox="1"/>
+          <p:nvPr/>
+        </p:nvSpPr>
+        <p:spPr>
+          <a:xfrm>
+            <a:off x="6807200" y="4152900"/>
+            <a:ext cx="2159000" cy="139700"/>
+          </a:xfrm>
+          <a:prstGeom prst="rect">
+            <a:avLst/>
+          </a:prstGeom>
+          <a:noFill/>
+        </p:spPr>
+        <p:txBody>
+          <a:bodyPr wrap="none" lIns="0" rIns="0" tIns="0" bIns="0" anchor="ctr">
+            <a:noAutofit/>
+          </a:bodyPr>
+          <a:lstStyle/>
+          <a:p>
+            <a:pPr rtl="1" algn="l"/>
+            <a:r>
+              <a:rPr sz="800" b="1" lang="fa-IR">
+                <a:solidFill>
+                  <a:srgbClr val="0B0B0B"/>
+                </a:solidFill>
+                <a:latin typeface="Tahoma"/>
+                <a:cs typeface="Tahoma"/>
+                <a:ea typeface="Tahoma"/>
+              </a:rPr>
+              <a:t>۴۵٬۳۶۱ — ۰٫۵۲ درصد</a:t>
+            </a:r>
+          </a:p>
+        </p:txBody>
+      </p:sp>
+      <p:sp>
+        <p:nvSpPr>
+          <p:cNvPr id="25" name="TextBox 24"/>
+          <p:cNvSpPr txBox="1"/>
+          <p:nvPr/>
+        </p:nvSpPr>
+        <p:spPr>
+          <a:xfrm>
+            <a:off x="8966200" y="4343400"/>
+            <a:ext cx="2616200" cy="139700"/>
+          </a:xfrm>
+          <a:prstGeom prst="rect">
+            <a:avLst/>
+          </a:prstGeom>
+          <a:noFill/>
+        </p:spPr>
+        <p:txBody>
+          <a:bodyPr wrap="none" lIns="0" rIns="0" tIns="0" bIns="0" anchor="ctr">
+            <a:noAutofit/>
+          </a:bodyPr>
+          <a:lstStyle/>
+          <a:p>
+            <a:pPr rtl="1" algn="r"/>
+            <a:r>
+              <a:rPr sz="800" b="0" lang="fa-IR">
+                <a:solidFill>
+                  <a:srgbClr val="4E4D4A"/>
+                </a:solidFill>
+                <a:latin typeface="Tahoma"/>
+                <a:cs typeface="Tahoma"/>
+                <a:ea typeface="Tahoma"/>
+              </a:rPr>
+              <a:t>ویژگی</a:t>
+            </a:r>
+          </a:p>
+        </p:txBody>
+      </p:sp>
+      <p:sp>
+        <p:nvSpPr>
+          <p:cNvPr id="26" name="TextBox 25"/>
+          <p:cNvSpPr txBox="1"/>
+          <p:nvPr/>
+        </p:nvSpPr>
+        <p:spPr>
+          <a:xfrm>
+            <a:off x="6807200" y="4343400"/>
+            <a:ext cx="2159000" cy="139700"/>
+          </a:xfrm>
+          <a:prstGeom prst="rect">
+            <a:avLst/>
+          </a:prstGeom>
+          <a:noFill/>
+        </p:spPr>
+        <p:txBody>
+          <a:bodyPr wrap="none" lIns="0" rIns="0" tIns="0" bIns="0" anchor="ctr">
+            <a:noAutofit/>
+          </a:bodyPr>
+          <a:lstStyle/>
+          <a:p>
+            <a:pPr rtl="1" algn="l"/>
+            <a:r>
+              <a:rPr sz="800" b="1" lang="fa-IR">
+                <a:solidFill>
+                  <a:srgbClr val="0B0B0B"/>
+                </a:solidFill>
+                <a:latin typeface="Tahoma"/>
+                <a:cs typeface="Tahoma"/>
+                <a:ea typeface="Tahoma"/>
+              </a:rPr>
+              <a:t>۳۹</a:t>
+            </a:r>
+          </a:p>
+        </p:txBody>
+      </p:sp>
+      <p:sp>
+        <p:nvSpPr>
+          <p:cNvPr id="27" name="TextBox 26"/>
+          <p:cNvSpPr txBox="1"/>
+          <p:nvPr/>
+        </p:nvSpPr>
+        <p:spPr>
+          <a:xfrm>
+            <a:off x="8966200" y="4533900"/>
+            <a:ext cx="2616200" cy="139700"/>
+          </a:xfrm>
+          <a:prstGeom prst="rect">
+            <a:avLst/>
+          </a:prstGeom>
+          <a:noFill/>
+        </p:spPr>
+        <p:txBody>
+          <a:bodyPr wrap="none" lIns="0" rIns="0" tIns="0" bIns="0" anchor="ctr">
+            <a:noAutofit/>
+          </a:bodyPr>
+          <a:lstStyle/>
+          <a:p>
+            <a:pPr rtl="1" algn="r"/>
+            <a:r>
+              <a:rPr sz="800" b="0" lang="fa-IR">
+                <a:solidFill>
+                  <a:srgbClr val="4E4D4A"/>
+                </a:solidFill>
+                <a:latin typeface="Tahoma"/>
+                <a:cs typeface="Tahoma"/>
+                <a:ea typeface="Tahoma"/>
+              </a:rPr>
+              <a:t>تفکیک با هش روی شناسهٔ مشترک</a:t>
+            </a:r>
+          </a:p>
+        </p:txBody>
+      </p:sp>
+      <p:sp>
+        <p:nvSpPr>
+          <p:cNvPr id="28" name="TextBox 27"/>
+          <p:cNvSpPr txBox="1"/>
+          <p:nvPr/>
+        </p:nvSpPr>
+        <p:spPr>
+          <a:xfrm>
+            <a:off x="6807200" y="4533900"/>
+            <a:ext cx="2159000" cy="139700"/>
+          </a:xfrm>
+          <a:prstGeom prst="rect">
+            <a:avLst/>
+          </a:prstGeom>
+          <a:noFill/>
+        </p:spPr>
+        <p:txBody>
+          <a:bodyPr wrap="none" lIns="0" rIns="0" tIns="0" bIns="0" anchor="ctr">
+            <a:noAutofit/>
+          </a:bodyPr>
+          <a:lstStyle/>
+          <a:p>
+            <a:pPr rtl="1" algn="l"/>
+            <a:r>
+              <a:rPr sz="800" b="1" lang="fa-IR">
+                <a:solidFill>
+                  <a:srgbClr val="0B0B0B"/>
+                </a:solidFill>
+                <a:latin typeface="Tahoma"/>
+                <a:cs typeface="Tahoma"/>
+                <a:ea typeface="Tahoma"/>
+              </a:rPr>
+              <a:t>۷۰ و ۳۰ درصد</a:t>
+            </a:r>
+          </a:p>
+        </p:txBody>
+      </p:sp>
+      <p:sp>
+        <p:nvSpPr>
+          <p:cNvPr id="29" name="TextBox 28"/>
+          <p:cNvSpPr txBox="1"/>
+          <p:nvPr/>
+        </p:nvSpPr>
+        <p:spPr>
+          <a:xfrm>
+            <a:off x="8966200" y="4724400"/>
+            <a:ext cx="2616200" cy="139700"/>
+          </a:xfrm>
+          <a:prstGeom prst="rect">
+            <a:avLst/>
+          </a:prstGeom>
+          <a:noFill/>
+        </p:spPr>
+        <p:txBody>
+          <a:bodyPr wrap="none" lIns="0" rIns="0" tIns="0" bIns="0" anchor="ctr">
+            <a:noAutofit/>
+          </a:bodyPr>
+          <a:lstStyle/>
+          <a:p>
+            <a:pPr rtl="1" algn="r"/>
+            <a:r>
+              <a:rPr sz="800" b="0" lang="fa-IR">
+                <a:solidFill>
+                  <a:srgbClr val="4E4D4A"/>
+                </a:solidFill>
+                <a:latin typeface="Tahoma"/>
+                <a:cs typeface="Tahoma"/>
+                <a:ea typeface="Tahoma"/>
+              </a:rPr>
+              <a:t>کالیبراسیون</a:t>
+            </a:r>
+          </a:p>
+        </p:txBody>
+      </p:sp>
+      <p:sp>
+        <p:nvSpPr>
+          <p:cNvPr id="30" name="TextBox 29"/>
+          <p:cNvSpPr txBox="1"/>
+          <p:nvPr/>
+        </p:nvSpPr>
+        <p:spPr>
+          <a:xfrm>
+            <a:off x="6807200" y="4724400"/>
+            <a:ext cx="2159000" cy="139700"/>
+          </a:xfrm>
+          <a:prstGeom prst="rect">
+            <a:avLst/>
+          </a:prstGeom>
+          <a:noFill/>
+        </p:spPr>
+        <p:txBody>
+          <a:bodyPr wrap="none" lIns="0" rIns="0" tIns="0" bIns="0" anchor="ctr">
+            <a:noAutofit/>
+          </a:bodyPr>
+          <a:lstStyle/>
+          <a:p>
+            <a:pPr rtl="1" algn="l"/>
+            <a:r>
+              <a:rPr sz="800" b="1" lang="fa-IR">
+                <a:solidFill>
+                  <a:srgbClr val="0B0B0B"/>
+                </a:solidFill>
+                <a:latin typeface="Tahoma"/>
+                <a:cs typeface="Tahoma"/>
+                <a:ea typeface="Tahoma"/>
+              </a:rPr>
+              <a:t>ایزوتونیک، روی نیمی از اعتبارسنجی</a:t>
+            </a:r>
+          </a:p>
+        </p:txBody>
+      </p:sp>
+      <p:sp>
+        <p:nvSpPr>
+          <p:cNvPr id="31" name="Rounded Rectangle 30"/>
+          <p:cNvSpPr/>
+          <p:nvPr/>
+        </p:nvSpPr>
+        <p:spPr>
+          <a:xfrm>
+            <a:off x="457200" y="3606800"/>
+            <a:ext cx="5994400" cy="1320800"/>
+          </a:xfrm>
+          <a:prstGeom prst="roundRect">
+            <a:avLst>
+              <a:gd name="adj" fmla="val 7000"/>
+            </a:avLst>
+          </a:prstGeom>
+          <a:solidFill>
+            <a:srgbClr val="F6F6F3"/>
+          </a:solidFill>
+          <a:ln w="9525">
+            <a:solidFill>
+              <a:srgbClr val="E8E8E4"/>
+            </a:solidFill>
+          </a:ln>
+          <a:effectLst/>
+        </p:spPr>
+        <p:txBody>
+          <a:bodyPr rtlCol="0" anchor="ctr" wrap="none"/>
+          <a:lstStyle/>
+          <a:p>
+            <a:pPr algn="ctr"/>
+          </a:p>
+        </p:txBody>
+      </p:sp>
+      <p:sp>
+        <p:nvSpPr>
+          <p:cNvPr id="32" name="TextBox 31"/>
+          <p:cNvSpPr txBox="1"/>
+          <p:nvPr/>
+        </p:nvSpPr>
+        <p:spPr>
+          <a:xfrm>
+            <a:off x="609600" y="3708400"/>
+            <a:ext cx="5689600" cy="152400"/>
+          </a:xfrm>
+          <a:prstGeom prst="rect">
+            <a:avLst/>
+          </a:prstGeom>
+          <a:noFill/>
+        </p:spPr>
+        <p:txBody>
+          <a:bodyPr wrap="none" lIns="0" rIns="0" tIns="0" bIns="0" anchor="ctr">
+            <a:noAutofit/>
+          </a:bodyPr>
+          <a:lstStyle/>
+          <a:p>
+            <a:pPr rtl="1" algn="r"/>
+            <a:r>
+              <a:rPr sz="950" b="1" lang="fa-IR">
+                <a:solidFill>
+                  <a:srgbClr val="4E4D4A"/>
+                </a:solidFill>
+                <a:latin typeface="Tahoma"/>
+                <a:cs typeface="Tahoma"/>
+                <a:ea typeface="Tahoma"/>
+              </a:rPr>
+              <a:t>تنظیمات مدل انتخاب‌شده</a:t>
+            </a:r>
+          </a:p>
+        </p:txBody>
+      </p:sp>
+      <p:sp>
+        <p:nvSpPr>
+          <p:cNvPr id="33" name="TextBox 32"/>
+          <p:cNvSpPr txBox="1"/>
+          <p:nvPr/>
+        </p:nvSpPr>
+        <p:spPr>
+          <a:xfrm>
+            <a:off x="4402667" y="3962400"/>
+            <a:ext cx="1769533" cy="139700"/>
+          </a:xfrm>
+          <a:prstGeom prst="rect">
+            <a:avLst/>
+          </a:prstGeom>
+          <a:noFill/>
+        </p:spPr>
+        <p:txBody>
+          <a:bodyPr wrap="none" lIns="0" rIns="0" tIns="0" bIns="0" anchor="ctr">
+            <a:noAutofit/>
+          </a:bodyPr>
+          <a:lstStyle/>
+          <a:p>
+            <a:pPr rtl="1" algn="r"/>
+            <a:r>
+              <a:rPr sz="800" b="0" lang="fa-IR">
+                <a:solidFill>
+                  <a:srgbClr val="86857F"/>
+                </a:solidFill>
+                <a:latin typeface="Tahoma"/>
+                <a:cs typeface="Tahoma"/>
+                <a:ea typeface="Tahoma"/>
+              </a:rPr>
+              <a:t>تعداد درخت</a:t>
+            </a:r>
+          </a:p>
+        </p:txBody>
+      </p:sp>
+      <p:sp>
+        <p:nvSpPr>
+          <p:cNvPr id="34" name="TextBox 33"/>
+          <p:cNvSpPr txBox="1"/>
+          <p:nvPr/>
+        </p:nvSpPr>
+        <p:spPr>
+          <a:xfrm>
+            <a:off x="4402667" y="3962400"/>
+            <a:ext cx="762000" cy="139700"/>
+          </a:xfrm>
+          <a:prstGeom prst="rect">
+            <a:avLst/>
+          </a:prstGeom>
+          <a:noFill/>
+        </p:spPr>
+        <p:txBody>
+          <a:bodyPr wrap="none" lIns="0" rIns="0" tIns="0" bIns="0" anchor="ctr">
+            <a:noAutofit/>
+          </a:bodyPr>
+          <a:lstStyle/>
+          <a:p>
+            <a:pPr rtl="1" algn="l"/>
+            <a:r>
+              <a:rPr sz="800" b="1" lang="fa-IR">
+                <a:solidFill>
+                  <a:srgbClr val="0B0B0B"/>
+                </a:solidFill>
+                <a:latin typeface="Tahoma"/>
+                <a:cs typeface="Tahoma"/>
+                <a:ea typeface="Tahoma"/>
+              </a:rPr>
+              <a:t>۴۰۰</a:t>
+            </a:r>
+          </a:p>
+        </p:txBody>
+      </p:sp>
+      <p:cxnSp>
+        <p:nvCxnSpPr>
+          <p:cNvPr id="35" name="Connector 34"/>
+          <p:cNvCxnSpPr/>
+          <p:nvPr/>
+        </p:nvCxnSpPr>
+        <p:spPr>
+          <a:xfrm>
+            <a:off x="4402667" y="4114800"/>
+            <a:ext cx="1769533" cy="0"/>
+          </a:xfrm>
+          <a:prstGeom prst="line">
+            <a:avLst/>
+          </a:prstGeom>
+          <a:ln w="6350">
+            <a:solidFill>
+              <a:srgbClr val="E2E1DB"/>
+            </a:solidFill>
+          </a:ln>
+          <a:effectLst/>
+        </p:spPr>
+      </p:cxnSp>
+      <p:sp>
+        <p:nvSpPr>
+          <p:cNvPr id="36" name="TextBox 35"/>
+          <p:cNvSpPr txBox="1"/>
+          <p:nvPr/>
+        </p:nvSpPr>
+        <p:spPr>
+          <a:xfrm>
+            <a:off x="4402667" y="4178300"/>
+            <a:ext cx="1769533" cy="139700"/>
+          </a:xfrm>
+          <a:prstGeom prst="rect">
+            <a:avLst/>
+          </a:prstGeom>
+          <a:noFill/>
+        </p:spPr>
+        <p:txBody>
+          <a:bodyPr wrap="none" lIns="0" rIns="0" tIns="0" bIns="0" anchor="ctr">
+            <a:noAutofit/>
+          </a:bodyPr>
+          <a:lstStyle/>
+          <a:p>
+            <a:pPr rtl="1" algn="r"/>
+            <a:r>
+              <a:rPr sz="800" b="0" lang="fa-IR">
+                <a:solidFill>
+                  <a:srgbClr val="86857F"/>
+                </a:solidFill>
+                <a:latin typeface="Tahoma"/>
+                <a:cs typeface="Tahoma"/>
+                <a:ea typeface="Tahoma"/>
+              </a:rPr>
+              <a:t>نرخ یادگیری</a:t>
+            </a:r>
+          </a:p>
+        </p:txBody>
+      </p:sp>
+      <p:sp>
+        <p:nvSpPr>
+          <p:cNvPr id="37" name="TextBox 36"/>
+          <p:cNvSpPr txBox="1"/>
+          <p:nvPr/>
+        </p:nvSpPr>
+        <p:spPr>
+          <a:xfrm>
+            <a:off x="4402667" y="4178300"/>
+            <a:ext cx="762000" cy="139700"/>
+          </a:xfrm>
+          <a:prstGeom prst="rect">
+            <a:avLst/>
+          </a:prstGeom>
+          <a:noFill/>
+        </p:spPr>
+        <p:txBody>
+          <a:bodyPr wrap="none" lIns="0" rIns="0" tIns="0" bIns="0" anchor="ctr">
+            <a:noAutofit/>
+          </a:bodyPr>
+          <a:lstStyle/>
+          <a:p>
+            <a:pPr rtl="1" algn="l"/>
+            <a:r>
+              <a:rPr sz="800" b="1" lang="fa-IR">
+                <a:solidFill>
+                  <a:srgbClr val="0B0B0B"/>
+                </a:solidFill>
+                <a:latin typeface="Tahoma"/>
+                <a:cs typeface="Tahoma"/>
+                <a:ea typeface="Tahoma"/>
+              </a:rPr>
+              <a:t>۰٫۰۶</a:t>
+            </a:r>
+          </a:p>
+        </p:txBody>
+      </p:sp>
+      <p:cxnSp>
+        <p:nvCxnSpPr>
+          <p:cNvPr id="38" name="Connector 37"/>
+          <p:cNvCxnSpPr/>
+          <p:nvPr/>
+        </p:nvCxnSpPr>
+        <p:spPr>
+          <a:xfrm>
+            <a:off x="4402667" y="4330700"/>
+            <a:ext cx="1769533" cy="0"/>
+          </a:xfrm>
+          <a:prstGeom prst="line">
+            <a:avLst/>
+          </a:prstGeom>
+          <a:ln w="6350">
+            <a:solidFill>
+              <a:srgbClr val="E2E1DB"/>
+            </a:solidFill>
+          </a:ln>
+          <a:effectLst/>
+        </p:spPr>
+      </p:cxnSp>
+      <p:sp>
+        <p:nvSpPr>
+          <p:cNvPr id="39" name="TextBox 38"/>
+          <p:cNvSpPr txBox="1"/>
+          <p:nvPr/>
+        </p:nvSpPr>
+        <p:spPr>
+          <a:xfrm>
+            <a:off x="4402667" y="4394200"/>
+            <a:ext cx="1769533" cy="139700"/>
+          </a:xfrm>
+          <a:prstGeom prst="rect">
+            <a:avLst/>
+          </a:prstGeom>
+          <a:noFill/>
+        </p:spPr>
+        <p:txBody>
+          <a:bodyPr wrap="none" lIns="0" rIns="0" tIns="0" bIns="0" anchor="ctr">
+            <a:noAutofit/>
+          </a:bodyPr>
+          <a:lstStyle/>
+          <a:p>
+            <a:pPr rtl="1" algn="r"/>
+            <a:r>
+              <a:rPr sz="800" b="0" lang="fa-IR">
+                <a:solidFill>
+                  <a:srgbClr val="86857F"/>
+                </a:solidFill>
+                <a:latin typeface="Tahoma"/>
+                <a:cs typeface="Tahoma"/>
+                <a:ea typeface="Tahoma"/>
+              </a:rPr>
+              <a:t>عمق هر درخت</a:t>
+            </a:r>
+          </a:p>
+        </p:txBody>
+      </p:sp>
+      <p:sp>
+        <p:nvSpPr>
+          <p:cNvPr id="40" name="TextBox 39"/>
+          <p:cNvSpPr txBox="1"/>
+          <p:nvPr/>
+        </p:nvSpPr>
+        <p:spPr>
+          <a:xfrm>
+            <a:off x="4402667" y="4394200"/>
+            <a:ext cx="762000" cy="139700"/>
+          </a:xfrm>
+          <a:prstGeom prst="rect">
+            <a:avLst/>
+          </a:prstGeom>
+          <a:noFill/>
+        </p:spPr>
+        <p:txBody>
+          <a:bodyPr wrap="none" lIns="0" rIns="0" tIns="0" bIns="0" anchor="ctr">
+            <a:noAutofit/>
+          </a:bodyPr>
+          <a:lstStyle/>
+          <a:p>
+            <a:pPr rtl="1" algn="l"/>
+            <a:r>
+              <a:rPr sz="800" b="1" lang="fa-IR">
+                <a:solidFill>
+                  <a:srgbClr val="0B0B0B"/>
+                </a:solidFill>
+                <a:latin typeface="Tahoma"/>
+                <a:cs typeface="Tahoma"/>
+                <a:ea typeface="Tahoma"/>
+              </a:rPr>
+              <a:t>۵</a:t>
+            </a:r>
+          </a:p>
+        </p:txBody>
+      </p:sp>
+      <p:cxnSp>
+        <p:nvCxnSpPr>
+          <p:cNvPr id="41" name="Connector 40"/>
+          <p:cNvCxnSpPr/>
+          <p:nvPr/>
+        </p:nvCxnSpPr>
+        <p:spPr>
+          <a:xfrm>
+            <a:off x="4402667" y="4546600"/>
+            <a:ext cx="1769533" cy="0"/>
+          </a:xfrm>
+          <a:prstGeom prst="line">
+            <a:avLst/>
+          </a:prstGeom>
+          <a:ln w="6350">
+            <a:solidFill>
+              <a:srgbClr val="E2E1DB"/>
+            </a:solidFill>
+          </a:ln>
+          <a:effectLst/>
+        </p:spPr>
+      </p:cxnSp>
+      <p:sp>
+        <p:nvSpPr>
+          <p:cNvPr id="42" name="TextBox 41"/>
+          <p:cNvSpPr txBox="1"/>
+          <p:nvPr/>
+        </p:nvSpPr>
+        <p:spPr>
+          <a:xfrm>
+            <a:off x="2506133" y="3962400"/>
+            <a:ext cx="1769533" cy="139700"/>
+          </a:xfrm>
+          <a:prstGeom prst="rect">
+            <a:avLst/>
+          </a:prstGeom>
+          <a:noFill/>
+        </p:spPr>
+        <p:txBody>
+          <a:bodyPr wrap="none" lIns="0" rIns="0" tIns="0" bIns="0" anchor="ctr">
+            <a:noAutofit/>
+          </a:bodyPr>
+          <a:lstStyle/>
+          <a:p>
+            <a:pPr rtl="1" algn="r"/>
+            <a:r>
+              <a:rPr sz="800" b="0" lang="fa-IR">
+                <a:solidFill>
+                  <a:srgbClr val="86857F"/>
+                </a:solidFill>
+                <a:latin typeface="Tahoma"/>
+                <a:cs typeface="Tahoma"/>
+                <a:ea typeface="Tahoma"/>
+              </a:rPr>
+              <a:t>برگ در هر درخت</a:t>
+            </a:r>
+          </a:p>
+        </p:txBody>
+      </p:sp>
+      <p:sp>
+        <p:nvSpPr>
+          <p:cNvPr id="43" name="TextBox 42"/>
+          <p:cNvSpPr txBox="1"/>
+          <p:nvPr/>
+        </p:nvSpPr>
+        <p:spPr>
+          <a:xfrm>
+            <a:off x="2506133" y="3962400"/>
+            <a:ext cx="762000" cy="139700"/>
+          </a:xfrm>
+          <a:prstGeom prst="rect">
+            <a:avLst/>
+          </a:prstGeom>
+          <a:noFill/>
+        </p:spPr>
+        <p:txBody>
+          <a:bodyPr wrap="none" lIns="0" rIns="0" tIns="0" bIns="0" anchor="ctr">
+            <a:noAutofit/>
+          </a:bodyPr>
+          <a:lstStyle/>
+          <a:p>
+            <a:pPr rtl="1" algn="l"/>
+            <a:r>
+              <a:rPr sz="800" b="1" lang="fa-IR">
+                <a:solidFill>
+                  <a:srgbClr val="0B0B0B"/>
+                </a:solidFill>
+                <a:latin typeface="Tahoma"/>
+                <a:cs typeface="Tahoma"/>
+                <a:ea typeface="Tahoma"/>
+              </a:rPr>
+              <a:t>۳۱</a:t>
+            </a:r>
+          </a:p>
+        </p:txBody>
+      </p:sp>
+      <p:cxnSp>
+        <p:nvCxnSpPr>
+          <p:cNvPr id="44" name="Connector 43"/>
+          <p:cNvCxnSpPr/>
+          <p:nvPr/>
+        </p:nvCxnSpPr>
+        <p:spPr>
+          <a:xfrm>
+            <a:off x="2506133" y="4114800"/>
+            <a:ext cx="1769534" cy="0"/>
+          </a:xfrm>
+          <a:prstGeom prst="line">
+            <a:avLst/>
+          </a:prstGeom>
+          <a:ln w="6350">
+            <a:solidFill>
+              <a:srgbClr val="E2E1DB"/>
+            </a:solidFill>
+          </a:ln>
+          <a:effectLst/>
+        </p:spPr>
+      </p:cxnSp>
+      <p:sp>
+        <p:nvSpPr>
+          <p:cNvPr id="45" name="TextBox 44"/>
+          <p:cNvSpPr txBox="1"/>
+          <p:nvPr/>
+        </p:nvSpPr>
+        <p:spPr>
+          <a:xfrm>
+            <a:off x="2506133" y="4178300"/>
+            <a:ext cx="1769533" cy="139700"/>
+          </a:xfrm>
+          <a:prstGeom prst="rect">
+            <a:avLst/>
+          </a:prstGeom>
+          <a:noFill/>
+        </p:spPr>
+        <p:txBody>
+          <a:bodyPr wrap="none" lIns="0" rIns="0" tIns="0" bIns="0" anchor="ctr">
+            <a:noAutofit/>
+          </a:bodyPr>
+          <a:lstStyle/>
+          <a:p>
+            <a:pPr rtl="1" algn="r"/>
+            <a:r>
+              <a:rPr sz="800" b="0" lang="fa-IR">
+                <a:solidFill>
+                  <a:srgbClr val="86857F"/>
+                </a:solidFill>
+                <a:latin typeface="Tahoma"/>
+                <a:cs typeface="Tahoma"/>
+                <a:ea typeface="Tahoma"/>
+              </a:rPr>
+              <a:t>حداقل نمونه در برگ</a:t>
+            </a:r>
+          </a:p>
+        </p:txBody>
+      </p:sp>
+      <p:sp>
+        <p:nvSpPr>
+          <p:cNvPr id="46" name="TextBox 45"/>
+          <p:cNvSpPr txBox="1"/>
+          <p:nvPr/>
+        </p:nvSpPr>
+        <p:spPr>
+          <a:xfrm>
+            <a:off x="2506133" y="4178300"/>
+            <a:ext cx="762000" cy="139700"/>
+          </a:xfrm>
+          <a:prstGeom prst="rect">
+            <a:avLst/>
+          </a:prstGeom>
+          <a:noFill/>
+        </p:spPr>
+        <p:txBody>
+          <a:bodyPr wrap="none" lIns="0" rIns="0" tIns="0" bIns="0" anchor="ctr">
+            <a:noAutofit/>
+          </a:bodyPr>
+          <a:lstStyle/>
+          <a:p>
+            <a:pPr rtl="1" algn="l"/>
+            <a:r>
+              <a:rPr sz="800" b="1" lang="fa-IR">
+                <a:solidFill>
+                  <a:srgbClr val="0B0B0B"/>
+                </a:solidFill>
+                <a:latin typeface="Tahoma"/>
+                <a:cs typeface="Tahoma"/>
+                <a:ea typeface="Tahoma"/>
+              </a:rPr>
+              <a:t>۲۰۰</a:t>
+            </a:r>
+          </a:p>
+        </p:txBody>
+      </p:sp>
+      <p:cxnSp>
+        <p:nvCxnSpPr>
+          <p:cNvPr id="47" name="Connector 46"/>
+          <p:cNvCxnSpPr/>
+          <p:nvPr/>
+        </p:nvCxnSpPr>
+        <p:spPr>
+          <a:xfrm>
+            <a:off x="2506133" y="4330700"/>
+            <a:ext cx="1769534" cy="0"/>
+          </a:xfrm>
+          <a:prstGeom prst="line">
+            <a:avLst/>
+          </a:prstGeom>
+          <a:ln w="6350">
+            <a:solidFill>
+              <a:srgbClr val="E2E1DB"/>
+            </a:solidFill>
+          </a:ln>
+          <a:effectLst/>
+        </p:spPr>
+      </p:cxnSp>
+      <p:sp>
+        <p:nvSpPr>
+          <p:cNvPr id="48" name="TextBox 47"/>
+          <p:cNvSpPr txBox="1"/>
+          <p:nvPr/>
+        </p:nvSpPr>
+        <p:spPr>
+          <a:xfrm>
+            <a:off x="2506133" y="4394200"/>
+            <a:ext cx="1769533" cy="139700"/>
+          </a:xfrm>
+          <a:prstGeom prst="rect">
+            <a:avLst/>
+          </a:prstGeom>
+          <a:noFill/>
+        </p:spPr>
+        <p:txBody>
+          <a:bodyPr wrap="none" lIns="0" rIns="0" tIns="0" bIns="0" anchor="ctr">
+            <a:noAutofit/>
+          </a:bodyPr>
+          <a:lstStyle/>
+          <a:p>
+            <a:pPr rtl="1" algn="r"/>
+            <a:r>
+              <a:rPr sz="800" b="0" lang="fa-IR">
+                <a:solidFill>
+                  <a:srgbClr val="86857F"/>
+                </a:solidFill>
+                <a:latin typeface="Tahoma"/>
+                <a:cs typeface="Tahoma"/>
+                <a:ea typeface="Tahoma"/>
+              </a:rPr>
+              <a:t>جریمه L2</a:t>
+            </a:r>
+          </a:p>
+        </p:txBody>
+      </p:sp>
+      <p:sp>
+        <p:nvSpPr>
+          <p:cNvPr id="49" name="TextBox 48"/>
+          <p:cNvSpPr txBox="1"/>
+          <p:nvPr/>
+        </p:nvSpPr>
+        <p:spPr>
+          <a:xfrm>
+            <a:off x="2506133" y="4394200"/>
+            <a:ext cx="762000" cy="139700"/>
+          </a:xfrm>
+          <a:prstGeom prst="rect">
+            <a:avLst/>
+          </a:prstGeom>
+          <a:noFill/>
+        </p:spPr>
+        <p:txBody>
+          <a:bodyPr wrap="none" lIns="0" rIns="0" tIns="0" bIns="0" anchor="ctr">
+            <a:noAutofit/>
+          </a:bodyPr>
+          <a:lstStyle/>
+          <a:p>
+            <a:pPr rtl="1" algn="l"/>
+            <a:r>
+              <a:rPr sz="800" b="1" lang="fa-IR">
+                <a:solidFill>
+                  <a:srgbClr val="0B0B0B"/>
+                </a:solidFill>
+                <a:latin typeface="Tahoma"/>
+                <a:cs typeface="Tahoma"/>
+                <a:ea typeface="Tahoma"/>
+              </a:rPr>
+              <a:t>۱٫۰</a:t>
+            </a:r>
+          </a:p>
+        </p:txBody>
+      </p:sp>
+      <p:cxnSp>
+        <p:nvCxnSpPr>
+          <p:cNvPr id="50" name="Connector 49"/>
+          <p:cNvCxnSpPr/>
+          <p:nvPr/>
+        </p:nvCxnSpPr>
+        <p:spPr>
+          <a:xfrm>
+            <a:off x="2506133" y="4546600"/>
+            <a:ext cx="1769534" cy="0"/>
+          </a:xfrm>
+          <a:prstGeom prst="line">
+            <a:avLst/>
+          </a:prstGeom>
+          <a:ln w="6350">
+            <a:solidFill>
+              <a:srgbClr val="E2E1DB"/>
+            </a:solidFill>
+          </a:ln>
+          <a:effectLst/>
+        </p:spPr>
+      </p:cxnSp>
+      <p:sp>
+        <p:nvSpPr>
+          <p:cNvPr id="51" name="TextBox 50"/>
+          <p:cNvSpPr txBox="1"/>
+          <p:nvPr/>
+        </p:nvSpPr>
+        <p:spPr>
+          <a:xfrm>
+            <a:off x="609600" y="3962400"/>
+            <a:ext cx="1769533" cy="139700"/>
+          </a:xfrm>
+          <a:prstGeom prst="rect">
+            <a:avLst/>
+          </a:prstGeom>
+          <a:noFill/>
+        </p:spPr>
+        <p:txBody>
+          <a:bodyPr wrap="none" lIns="0" rIns="0" tIns="0" bIns="0" anchor="ctr">
+            <a:noAutofit/>
+          </a:bodyPr>
+          <a:lstStyle/>
+          <a:p>
+            <a:pPr rtl="1" algn="r"/>
+            <a:r>
+              <a:rPr sz="800" b="0" lang="fa-IR">
+                <a:solidFill>
+                  <a:srgbClr val="86857F"/>
+                </a:solidFill>
+                <a:latin typeface="Tahoma"/>
+                <a:cs typeface="Tahoma"/>
+                <a:ea typeface="Tahoma"/>
+              </a:rPr>
+              <a:t>توقف زودهنگام</a:t>
+            </a:r>
+          </a:p>
+        </p:txBody>
+      </p:sp>
+      <p:sp>
+        <p:nvSpPr>
+          <p:cNvPr id="52" name="TextBox 51"/>
+          <p:cNvSpPr txBox="1"/>
+          <p:nvPr/>
+        </p:nvSpPr>
+        <p:spPr>
+          <a:xfrm>
+            <a:off x="609600" y="3962400"/>
+            <a:ext cx="762000" cy="139700"/>
+          </a:xfrm>
+          <a:prstGeom prst="rect">
+            <a:avLst/>
+          </a:prstGeom>
+          <a:noFill/>
+        </p:spPr>
+        <p:txBody>
+          <a:bodyPr wrap="none" lIns="0" rIns="0" tIns="0" bIns="0" anchor="ctr">
+            <a:noAutofit/>
+          </a:bodyPr>
+          <a:lstStyle/>
+          <a:p>
+            <a:pPr rtl="1" algn="l"/>
+            <a:r>
+              <a:rPr sz="800" b="1" lang="fa-IR">
+                <a:solidFill>
+                  <a:srgbClr val="0B0B0B"/>
+                </a:solidFill>
+                <a:latin typeface="Tahoma"/>
+                <a:cs typeface="Tahoma"/>
+                <a:ea typeface="Tahoma"/>
+              </a:rPr>
+              <a:t>۳۰ دور بدون بهبود</a:t>
+            </a:r>
+          </a:p>
+        </p:txBody>
+      </p:sp>
+      <p:cxnSp>
+        <p:nvCxnSpPr>
+          <p:cNvPr id="53" name="Connector 52"/>
+          <p:cNvCxnSpPr/>
+          <p:nvPr/>
+        </p:nvCxnSpPr>
+        <p:spPr>
+          <a:xfrm>
+            <a:off x="609600" y="4114800"/>
+            <a:ext cx="1769533" cy="0"/>
+          </a:xfrm>
+          <a:prstGeom prst="line">
+            <a:avLst/>
+          </a:prstGeom>
+          <a:ln w="6350">
+            <a:solidFill>
+              <a:srgbClr val="E2E1DB"/>
+            </a:solidFill>
+          </a:ln>
+          <a:effectLst/>
+        </p:spPr>
+      </p:cxnSp>
+      <p:sp>
+        <p:nvSpPr>
+          <p:cNvPr id="54" name="TextBox 53"/>
+          <p:cNvSpPr txBox="1"/>
+          <p:nvPr/>
+        </p:nvSpPr>
+        <p:spPr>
+          <a:xfrm>
+            <a:off x="609600" y="4178300"/>
+            <a:ext cx="1769533" cy="139700"/>
+          </a:xfrm>
+          <a:prstGeom prst="rect">
+            <a:avLst/>
+          </a:prstGeom>
+          <a:noFill/>
+        </p:spPr>
+        <p:txBody>
+          <a:bodyPr wrap="none" lIns="0" rIns="0" tIns="0" bIns="0" anchor="ctr">
+            <a:noAutofit/>
+          </a:bodyPr>
+          <a:lstStyle/>
+          <a:p>
+            <a:pPr rtl="1" algn="r"/>
+            <a:r>
+              <a:rPr sz="800" b="0" lang="fa-IR">
+                <a:solidFill>
+                  <a:srgbClr val="86857F"/>
+                </a:solidFill>
+                <a:latin typeface="Tahoma"/>
+                <a:cs typeface="Tahoma"/>
+                <a:ea typeface="Tahoma"/>
+              </a:rPr>
+              <a:t>وزن کلاس</a:t>
+            </a:r>
+          </a:p>
+        </p:txBody>
+      </p:sp>
+      <p:sp>
+        <p:nvSpPr>
+          <p:cNvPr id="55" name="TextBox 54"/>
+          <p:cNvSpPr txBox="1"/>
+          <p:nvPr/>
+        </p:nvSpPr>
+        <p:spPr>
+          <a:xfrm>
+            <a:off x="609600" y="4178300"/>
+            <a:ext cx="762000" cy="139700"/>
+          </a:xfrm>
+          <a:prstGeom prst="rect">
+            <a:avLst/>
+          </a:prstGeom>
+          <a:noFill/>
+        </p:spPr>
+        <p:txBody>
+          <a:bodyPr wrap="none" lIns="0" rIns="0" tIns="0" bIns="0" anchor="ctr">
+            <a:noAutofit/>
+          </a:bodyPr>
+          <a:lstStyle/>
+          <a:p>
+            <a:pPr rtl="1" algn="l"/>
+            <a:r>
+              <a:rPr sz="800" b="1" lang="fa-IR">
+                <a:solidFill>
+                  <a:srgbClr val="0B0B0B"/>
+                </a:solidFill>
+                <a:latin typeface="Tahoma"/>
+                <a:cs typeface="Tahoma"/>
+                <a:ea typeface="Tahoma"/>
+              </a:rPr>
+              <a:t>متوازن</a:t>
+            </a:r>
+          </a:p>
+        </p:txBody>
+      </p:sp>
+      <p:cxnSp>
+        <p:nvCxnSpPr>
+          <p:cNvPr id="56" name="Connector 55"/>
+          <p:cNvCxnSpPr/>
+          <p:nvPr/>
+        </p:nvCxnSpPr>
+        <p:spPr>
+          <a:xfrm>
+            <a:off x="609600" y="4330700"/>
+            <a:ext cx="1769533" cy="0"/>
+          </a:xfrm>
+          <a:prstGeom prst="line">
+            <a:avLst/>
+          </a:prstGeom>
+          <a:ln w="6350">
+            <a:solidFill>
+              <a:srgbClr val="E2E1DB"/>
+            </a:solidFill>
+          </a:ln>
+          <a:effectLst/>
+        </p:spPr>
+      </p:cxnSp>
+      <p:sp>
+        <p:nvSpPr>
+          <p:cNvPr id="57" name="TextBox 56"/>
+          <p:cNvSpPr txBox="1"/>
+          <p:nvPr/>
+        </p:nvSpPr>
+        <p:spPr>
+          <a:xfrm>
+            <a:off x="609600" y="4394200"/>
+            <a:ext cx="1769533" cy="139700"/>
+          </a:xfrm>
+          <a:prstGeom prst="rect">
+            <a:avLst/>
+          </a:prstGeom>
+          <a:noFill/>
+        </p:spPr>
+        <p:txBody>
+          <a:bodyPr wrap="none" lIns="0" rIns="0" tIns="0" bIns="0" anchor="ctr">
+            <a:noAutofit/>
+          </a:bodyPr>
+          <a:lstStyle/>
+          <a:p>
+            <a:pPr rtl="1" algn="r"/>
+            <a:r>
+              <a:rPr sz="800" b="0" lang="fa-IR">
+                <a:solidFill>
+                  <a:srgbClr val="86857F"/>
+                </a:solidFill>
+                <a:latin typeface="Tahoma"/>
+                <a:cs typeface="Tahoma"/>
+                <a:ea typeface="Tahoma"/>
+              </a:rPr>
+              <a:t>بذر تصادفی</a:t>
+            </a:r>
+          </a:p>
+        </p:txBody>
+      </p:sp>
+      <p:sp>
+        <p:nvSpPr>
+          <p:cNvPr id="58" name="TextBox 57"/>
+          <p:cNvSpPr txBox="1"/>
+          <p:nvPr/>
+        </p:nvSpPr>
+        <p:spPr>
+          <a:xfrm>
+            <a:off x="609600" y="4394200"/>
+            <a:ext cx="762000" cy="139700"/>
+          </a:xfrm>
+          <a:prstGeom prst="rect">
+            <a:avLst/>
+          </a:prstGeom>
+          <a:noFill/>
+        </p:spPr>
+        <p:txBody>
+          <a:bodyPr wrap="none" lIns="0" rIns="0" tIns="0" bIns="0" anchor="ctr">
+            <a:noAutofit/>
+          </a:bodyPr>
+          <a:lstStyle/>
+          <a:p>
+            <a:pPr rtl="1" algn="l"/>
+            <a:r>
+              <a:rPr sz="800" b="1" lang="fa-IR">
+                <a:solidFill>
+                  <a:srgbClr val="0B0B0B"/>
+                </a:solidFill>
+                <a:latin typeface="Tahoma"/>
+                <a:cs typeface="Tahoma"/>
+                <a:ea typeface="Tahoma"/>
+              </a:rPr>
+              <a:t>۴۲</a:t>
+            </a:r>
+          </a:p>
+        </p:txBody>
+      </p:sp>
+      <p:cxnSp>
+        <p:nvCxnSpPr>
+          <p:cNvPr id="59" name="Connector 58"/>
+          <p:cNvCxnSpPr/>
+          <p:nvPr/>
+        </p:nvCxnSpPr>
+        <p:spPr>
+          <a:xfrm>
+            <a:off x="609600" y="4546600"/>
+            <a:ext cx="1769533" cy="0"/>
+          </a:xfrm>
+          <a:prstGeom prst="line">
+            <a:avLst/>
+          </a:prstGeom>
+          <a:ln w="6350">
+            <a:solidFill>
+              <a:srgbClr val="E2E1DB"/>
+            </a:solidFill>
+          </a:ln>
+          <a:effectLst/>
+        </p:spPr>
+      </p:cxnSp>
+      <p:sp>
+        <p:nvSpPr>
+          <p:cNvPr id="60" name="Rounded Rectangle 59"/>
+          <p:cNvSpPr/>
+          <p:nvPr/>
+        </p:nvSpPr>
+        <p:spPr>
+          <a:xfrm>
+            <a:off x="8060267" y="5054600"/>
+            <a:ext cx="3674533" cy="1092200"/>
+          </a:xfrm>
+          <a:prstGeom prst="roundRect">
+            <a:avLst>
+              <a:gd name="adj" fmla="val 7000"/>
+            </a:avLst>
+          </a:prstGeom>
+          <a:solidFill>
+            <a:srgbClr val="F6F6F3"/>
+          </a:solidFill>
+          <a:ln w="9525">
+            <a:solidFill>
+              <a:srgbClr val="E8E8E4"/>
+            </a:solidFill>
+          </a:ln>
+          <a:effectLst/>
+        </p:spPr>
+        <p:txBody>
+          <a:bodyPr rtlCol="0" anchor="ctr" wrap="none"/>
+          <a:lstStyle/>
+          <a:p>
+            <a:pPr algn="ctr"/>
+          </a:p>
+        </p:txBody>
+      </p:sp>
+      <p:cxnSp>
+        <p:nvCxnSpPr>
+          <p:cNvPr id="61" name="Connector 60"/>
+          <p:cNvCxnSpPr/>
+          <p:nvPr/>
+        </p:nvCxnSpPr>
+        <p:spPr>
+          <a:xfrm>
+            <a:off x="11734800" y="5054600"/>
+            <a:ext cx="0" cy="1092200"/>
+          </a:xfrm>
+          <a:prstGeom prst="line">
+            <a:avLst/>
+          </a:prstGeom>
+          <a:ln w="31750">
+            <a:solidFill>
+              <a:srgbClr val="FAB219"/>
+            </a:solidFill>
+          </a:ln>
+          <a:effectLst/>
+        </p:spPr>
+      </p:cxnSp>
+      <p:sp>
+        <p:nvSpPr>
+          <p:cNvPr id="62" name="TextBox 61"/>
+          <p:cNvSpPr txBox="1"/>
+          <p:nvPr/>
+        </p:nvSpPr>
+        <p:spPr>
+          <a:xfrm>
+            <a:off x="8187267" y="5143500"/>
+            <a:ext cx="3420533" cy="152400"/>
+          </a:xfrm>
+          <a:prstGeom prst="rect">
+            <a:avLst/>
+          </a:prstGeom>
+          <a:noFill/>
+        </p:spPr>
+        <p:txBody>
+          <a:bodyPr wrap="square" lIns="0" rIns="0" tIns="0" bIns="0" anchor="t">
+            <a:noAutofit/>
+          </a:bodyPr>
+          <a:lstStyle/>
+          <a:p>
+            <a:pPr rtl="1" algn="r"/>
+            <a:r>
+              <a:rPr sz="850" b="1" lang="fa-IR">
+                <a:solidFill>
+                  <a:srgbClr val="0B0B0B"/>
+                </a:solidFill>
+                <a:latin typeface="Tahoma"/>
+                <a:cs typeface="Tahoma"/>
+                <a:ea typeface="Tahoma"/>
+              </a:rPr>
+              <a:t>رتبه‌بندی را بیشتر از سطح باور کنید</a:t>
+            </a:r>
+          </a:p>
+        </p:txBody>
+      </p:sp>
+      <p:sp>
+        <p:nvSpPr>
+          <p:cNvPr id="63" name="TextBox 62"/>
+          <p:cNvSpPr txBox="1"/>
+          <p:nvPr/>
+        </p:nvSpPr>
+        <p:spPr>
+          <a:xfrm>
+            <a:off x="8187267" y="5334000"/>
+            <a:ext cx="3420533" cy="711200"/>
+          </a:xfrm>
+          <a:prstGeom prst="rect">
+            <a:avLst/>
+          </a:prstGeom>
+          <a:noFill/>
+        </p:spPr>
+        <p:txBody>
+          <a:bodyPr wrap="square" lIns="0" rIns="0" tIns="0" bIns="0" anchor="t">
+            <a:noAutofit/>
+          </a:bodyPr>
+          <a:lstStyle/>
+          <a:p>
+            <a:pPr rtl="1" algn="r">
+              <a:lnSpc>
+                <a:spcPct val="140000"/>
+              </a:lnSpc>
+            </a:pPr>
+            <a:r>
+              <a:rPr sz="800" b="0" lang="fa-IR">
+                <a:solidFill>
+                  <a:srgbClr val="4E4D4A"/>
+                </a:solidFill>
+                <a:latin typeface="Tahoma"/>
+                <a:cs typeface="Tahoma"/>
+                <a:ea typeface="Tahoma"/>
+              </a:rPr>
+              <a:t>۱۲ ویژگی رانش معنادار دارند، بیشترین با PSI ۳٫۰۲. مدل روی جمعیت زنده ۰٫۵۹۵ درصد می‌دهد در برابر ۰٫۵۱۵ درصد روی آزمون. ترتیب ریسک در برابر این جابه‌جایی مقاوم است، عدد مطلق نه.</a:t>
+            </a:r>
+          </a:p>
+        </p:txBody>
+      </p:sp>
+      <p:sp>
+        <p:nvSpPr>
+          <p:cNvPr id="64" name="Rounded Rectangle 63"/>
+          <p:cNvSpPr/>
+          <p:nvPr/>
+        </p:nvSpPr>
+        <p:spPr>
+          <a:xfrm>
+            <a:off x="4258733" y="5054600"/>
+            <a:ext cx="3674533" cy="1092200"/>
+          </a:xfrm>
+          <a:prstGeom prst="roundRect">
+            <a:avLst>
+              <a:gd name="adj" fmla="val 7000"/>
+            </a:avLst>
+          </a:prstGeom>
+          <a:solidFill>
+            <a:srgbClr val="F6F6F3"/>
+          </a:solidFill>
+          <a:ln w="9525">
+            <a:solidFill>
+              <a:srgbClr val="E8E8E4"/>
+            </a:solidFill>
+          </a:ln>
+          <a:effectLst/>
+        </p:spPr>
+        <p:txBody>
+          <a:bodyPr rtlCol="0" anchor="ctr" wrap="none"/>
+          <a:lstStyle/>
+          <a:p>
+            <a:pPr algn="ctr"/>
+          </a:p>
+        </p:txBody>
+      </p:sp>
+      <p:cxnSp>
+        <p:nvCxnSpPr>
+          <p:cNvPr id="65" name="Connector 64"/>
+          <p:cNvCxnSpPr/>
+          <p:nvPr/>
+        </p:nvCxnSpPr>
+        <p:spPr>
+          <a:xfrm>
+            <a:off x="7933267" y="5054600"/>
+            <a:ext cx="0" cy="1092200"/>
+          </a:xfrm>
+          <a:prstGeom prst="line">
+            <a:avLst/>
+          </a:prstGeom>
+          <a:ln w="31750">
+            <a:solidFill>
+              <a:srgbClr val="FAB219"/>
+            </a:solidFill>
+          </a:ln>
+          <a:effectLst/>
+        </p:spPr>
+      </p:cxnSp>
+      <p:sp>
+        <p:nvSpPr>
+          <p:cNvPr id="66" name="TextBox 65"/>
+          <p:cNvSpPr txBox="1"/>
+          <p:nvPr/>
+        </p:nvSpPr>
+        <p:spPr>
+          <a:xfrm>
+            <a:off x="4385733" y="5143500"/>
+            <a:ext cx="3420533" cy="152400"/>
+          </a:xfrm>
+          <a:prstGeom prst="rect">
+            <a:avLst/>
+          </a:prstGeom>
+          <a:noFill/>
+        </p:spPr>
+        <p:txBody>
+          <a:bodyPr wrap="square" lIns="0" rIns="0" tIns="0" bIns="0" anchor="t">
+            <a:noAutofit/>
+          </a:bodyPr>
+          <a:lstStyle/>
+          <a:p>
+            <a:pPr rtl="1" algn="r"/>
+            <a:r>
+              <a:rPr sz="850" b="1" lang="fa-IR">
+                <a:solidFill>
+                  <a:srgbClr val="0B0B0B"/>
+                </a:solidFill>
+                <a:latin typeface="Tahoma"/>
+                <a:cs typeface="Tahoma"/>
+                <a:ea typeface="Tahoma"/>
+              </a:rPr>
+              <a:t>کالیبراسیون در دهک‌های امن محافظه‌کار است</a:t>
+            </a:r>
+          </a:p>
+        </p:txBody>
+      </p:sp>
+      <p:sp>
+        <p:nvSpPr>
+          <p:cNvPr id="67" name="TextBox 66"/>
+          <p:cNvSpPr txBox="1"/>
+          <p:nvPr/>
+        </p:nvSpPr>
+        <p:spPr>
+          <a:xfrm>
+            <a:off x="4385733" y="5334000"/>
+            <a:ext cx="3420533" cy="711200"/>
+          </a:xfrm>
+          <a:prstGeom prst="rect">
+            <a:avLst/>
+          </a:prstGeom>
+          <a:noFill/>
+        </p:spPr>
+        <p:txBody>
+          <a:bodyPr wrap="square" lIns="0" rIns="0" tIns="0" bIns="0" anchor="t">
+            <a:noAutofit/>
+          </a:bodyPr>
+          <a:lstStyle/>
+          <a:p>
+            <a:pPr rtl="1" algn="r">
+              <a:lnSpc>
+                <a:spcPct val="140000"/>
+              </a:lnSpc>
+            </a:pPr>
+            <a:r>
+              <a:rPr sz="800" b="0" lang="fa-IR">
+                <a:solidFill>
+                  <a:srgbClr val="4E4D4A"/>
+                </a:solidFill>
+                <a:latin typeface="Tahoma"/>
+                <a:cs typeface="Tahoma"/>
+                <a:ea typeface="Tahoma"/>
+              </a:rPr>
+              <a:t>در سه دهک امن، ریسک مشاهده‌شده ۰٫۷۸ برابر چیزی است که مدل پیش‌بینی می‌کند — یعنی بیش از واقع برآورد می‌کند. جهتش به نفع ماست، ولی عدد را نقطه‌ای نخوانید.</a:t>
+            </a:r>
+          </a:p>
+        </p:txBody>
+      </p:sp>
+      <p:sp>
+        <p:nvSpPr>
+          <p:cNvPr id="68" name="Rounded Rectangle 67"/>
+          <p:cNvSpPr/>
+          <p:nvPr/>
+        </p:nvSpPr>
+        <p:spPr>
+          <a:xfrm>
+            <a:off x="457200" y="5054600"/>
+            <a:ext cx="3674533" cy="1092200"/>
+          </a:xfrm>
+          <a:prstGeom prst="roundRect">
+            <a:avLst>
+              <a:gd name="adj" fmla="val 7000"/>
+            </a:avLst>
+          </a:prstGeom>
+          <a:solidFill>
+            <a:srgbClr val="F6F6F3"/>
+          </a:solidFill>
+          <a:ln w="9525">
+            <a:solidFill>
+              <a:srgbClr val="E8E8E4"/>
+            </a:solidFill>
+          </a:ln>
+          <a:effectLst/>
+        </p:spPr>
+        <p:txBody>
+          <a:bodyPr rtlCol="0" anchor="ctr" wrap="none"/>
+          <a:lstStyle/>
+          <a:p>
+            <a:pPr algn="ctr"/>
+          </a:p>
+        </p:txBody>
+      </p:sp>
+      <p:cxnSp>
+        <p:nvCxnSpPr>
+          <p:cNvPr id="69" name="Connector 68"/>
+          <p:cNvCxnSpPr/>
+          <p:nvPr/>
+        </p:nvCxnSpPr>
+        <p:spPr>
+          <a:xfrm>
+            <a:off x="4131733" y="5054600"/>
+            <a:ext cx="0" cy="1092200"/>
+          </a:xfrm>
+          <a:prstGeom prst="line">
+            <a:avLst/>
+          </a:prstGeom>
+          <a:ln w="31750">
+            <a:solidFill>
+              <a:srgbClr val="FAB219"/>
+            </a:solidFill>
+          </a:ln>
+          <a:effectLst/>
+        </p:spPr>
+      </p:cxnSp>
+      <p:sp>
+        <p:nvSpPr>
+          <p:cNvPr id="70" name="TextBox 69"/>
+          <p:cNvSpPr txBox="1"/>
+          <p:nvPr/>
+        </p:nvSpPr>
+        <p:spPr>
+          <a:xfrm>
+            <a:off x="584200" y="5143500"/>
+            <a:ext cx="3420533" cy="152400"/>
+          </a:xfrm>
+          <a:prstGeom prst="rect">
+            <a:avLst/>
+          </a:prstGeom>
+          <a:noFill/>
+        </p:spPr>
+        <p:txBody>
+          <a:bodyPr wrap="square" lIns="0" rIns="0" tIns="0" bIns="0" anchor="t">
+            <a:noAutofit/>
+          </a:bodyPr>
+          <a:lstStyle/>
+          <a:p>
+            <a:pPr rtl="1" algn="r"/>
+            <a:r>
+              <a:rPr sz="850" b="1" lang="fa-IR">
+                <a:solidFill>
+                  <a:srgbClr val="0B0B0B"/>
+                </a:solidFill>
+                <a:latin typeface="Tahoma"/>
+                <a:cs typeface="Tahoma"/>
+                <a:ea typeface="Tahoma"/>
+              </a:rPr>
+              <a:t>سطح اعداد تأییدنشده است</a:t>
+            </a:r>
+          </a:p>
+        </p:txBody>
+      </p:sp>
+      <p:sp>
+        <p:nvSpPr>
+          <p:cNvPr id="71" name="TextBox 70"/>
+          <p:cNvSpPr txBox="1"/>
+          <p:nvPr/>
+        </p:nvSpPr>
+        <p:spPr>
+          <a:xfrm>
+            <a:off x="584200" y="5334000"/>
+            <a:ext cx="3420533" cy="711200"/>
+          </a:xfrm>
+          <a:prstGeom prst="rect">
+            <a:avLst/>
+          </a:prstGeom>
+          <a:noFill/>
+        </p:spPr>
+        <p:txBody>
+          <a:bodyPr wrap="square" lIns="0" rIns="0" tIns="0" bIns="0" anchor="t">
+            <a:noAutofit/>
+          </a:bodyPr>
+          <a:lstStyle/>
+          <a:p>
+            <a:pPr rtl="1" algn="r">
+              <a:lnSpc>
+                <a:spcPct val="140000"/>
+              </a:lnSpc>
+            </a:pPr>
+            <a:r>
+              <a:rPr sz="800" b="0" lang="fa-IR">
+                <a:solidFill>
+                  <a:srgbClr val="4E4D4A"/>
+                </a:solidFill>
+                <a:latin typeface="Tahoma"/>
+                <a:cs typeface="Tahoma"/>
+                <a:ea typeface="Tahoma"/>
+              </a:rPr>
+              <a:t>لیبل روی افق ۴ قبض بسته می‌شود، درحالی‌که نرخ یک‌ماههٔ اندازه‌گیری‌شده ۰٫۲۲۰۸ درصد است. شکل نتیجه درست است؛ سطحش تا اجرای آزمایشی تأیید نمی‌شود.</a:t>
+            </a:r>
+          </a:p>
+        </p:txBody>
+      </p:sp>
+      <p:cxnSp>
+        <p:nvCxnSpPr>
+          <p:cNvPr id="72" name="Connector 71"/>
+          <p:cNvCxnSpPr/>
+          <p:nvPr/>
+        </p:nvCxnSpPr>
+        <p:spPr>
+          <a:xfrm>
+            <a:off x="457200" y="6426200"/>
+            <a:ext cx="11277600" cy="0"/>
+          </a:xfrm>
+          <a:prstGeom prst="line">
+            <a:avLst/>
+          </a:prstGeom>
+          <a:ln w="9525">
+            <a:solidFill>
+              <a:srgbClr val="E8E8E4"/>
+            </a:solidFill>
+          </a:ln>
+          <a:effectLst/>
+        </p:spPr>
+      </p:cxnSp>
+      <p:sp>
+        <p:nvSpPr>
+          <p:cNvPr id="73" name="TextBox 72"/>
+          <p:cNvSpPr txBox="1"/>
+          <p:nvPr/>
+        </p:nvSpPr>
+        <p:spPr>
+          <a:xfrm>
+            <a:off x="457200" y="6489700"/>
+            <a:ext cx="11277600" cy="304800"/>
+          </a:xfrm>
+          <a:prstGeom prst="rect">
+            <a:avLst/>
+          </a:prstGeom>
+          <a:noFill/>
+        </p:spPr>
+        <p:txBody>
+          <a:bodyPr wrap="square" lIns="0" rIns="0" tIns="0" bIns="0" anchor="t">
+            <a:noAutofit/>
+          </a:bodyPr>
+          <a:lstStyle/>
+          <a:p>
+            <a:pPr rtl="1" algn="r"/>
+            <a:r>
+              <a:rPr sz="750" b="0" lang="fa-IR">
+                <a:solidFill>
+                  <a:srgbClr val="86857F"/>
+                </a:solidFill>
+                <a:latin typeface="Tahoma"/>
+                <a:cs typeface="Tahoma"/>
+                <a:ea typeface="Tahoma"/>
+              </a:rPr>
+              <a:t>مبنا و چالشگر روی همان تفکیک آموزش دیدند؛ انتخاب فقط بر اساس AUC روی دادهٔ اعتبارسنجی بود؛ دادهٔ کنارگذاشته تا آخر کنار ماند و یک بار خوانده شد؛ هیچ مشترکی در دو طرف تفکیک نیست، چون هش تابعی خالص از شناسهٔ اوست.</a:t>
+            </a:r>
+          </a:p>
+        </p:txBody>
+      </p:sp>
+    </p:spTree>
+  </p:cSld>
+  <p:clrMapOvr>
+    <a:masterClrMapping/>
+  </p:clrMapOvr>
+</p:sld>
+</file>
+
+<file path=ppt/slides/slide3.xml><?xml version="1.0" encoding="utf-8"?>
 <p:sld xmlns:a="http://schemas.openxmlformats.org/drawingml/2006/main" xmlns:p="http://schemas.openxmlformats.org/presentationml/2006/main" xmlns:r="http://schemas.openxmlformats.org/officeDocument/2006/relationships">
   <p:cSld>
     <p:spTree>
